--- a/House-Price-Prediction-Project-Recap.pptx
+++ b/House-Price-Prediction-Project-Recap.pptx
@@ -4,6 +4,9 @@
   <p:sldMasterIdLst>
     <p:sldMasterId id="2147483648" r:id="rId1"/>
   </p:sldMasterIdLst>
+  <p:notesMasterIdLst>
+    <p:notesMasterId r:id="rId8"/>
+  </p:notesMasterIdLst>
   <p:sldIdLst>
     <p:sldId id="256" r:id="rId2"/>
     <p:sldId id="257" r:id="rId3"/>
@@ -12,45 +15,114 @@
     <p:sldId id="260" r:id="rId6"/>
     <p:sldId id="261" r:id="rId7"/>
   </p:sldIdLst>
-  <p:notesMasterIdLst>
-    <p:notesMasterId r:id="rId8"/>
-  </p:notesMasterIdLst>
   <p:sldSz cx="14630400" cy="8229600"/>
   <p:notesSz cx="8229600" cy="14630400"/>
   <p:embeddedFontLst>
     <p:embeddedFont>
-      <p:font typeface="Petrona"/>
-      <p:regular r:id="rId13"/>
-    </p:embeddedFont>
-    <p:embeddedFont>
-      <p:font typeface="Petrona"/>
-      <p:regular r:id="rId14"/>
-    </p:embeddedFont>
-    <p:embeddedFont>
-      <p:font typeface="Petrona"/>
-      <p:regular r:id="rId15"/>
-    </p:embeddedFont>
-    <p:embeddedFont>
-      <p:font typeface="Petrona"/>
-      <p:regular r:id="rId16"/>
-    </p:embeddedFont>
-    <p:embeddedFont>
-      <p:font typeface="Inter"/>
-      <p:regular r:id="rId17"/>
-    </p:embeddedFont>
-    <p:embeddedFont>
-      <p:font typeface="Inter"/>
-      <p:regular r:id="rId18"/>
-    </p:embeddedFont>
-    <p:embeddedFont>
-      <p:font typeface="Inter"/>
-      <p:regular r:id="rId19"/>
-    </p:embeddedFont>
-    <p:embeddedFont>
-      <p:font typeface="Inter"/>
-      <p:regular r:id="rId20"/>
+      <p:font typeface="Inter" panose="02000503000000020004"/>
+      <p:regular r:id="rId9"/>
     </p:embeddedFont>
   </p:embeddedFontLst>
+  <p:defaultTextStyle>
+    <a:defPPr>
+      <a:defRPr lang="en-US"/>
+    </a:defPPr>
+    <a:lvl1pPr marL="0" algn="l" defTabSz="914400" rtl="0" eaLnBrk="1" latinLnBrk="0" hangingPunct="1">
+      <a:defRPr sz="1800" kern="1200">
+        <a:solidFill>
+          <a:schemeClr val="tx1"/>
+        </a:solidFill>
+        <a:latin typeface="+mn-lt"/>
+        <a:ea typeface="+mn-ea"/>
+        <a:cs typeface="+mn-cs"/>
+      </a:defRPr>
+    </a:lvl1pPr>
+    <a:lvl2pPr marL="457200" algn="l" defTabSz="914400" rtl="0" eaLnBrk="1" latinLnBrk="0" hangingPunct="1">
+      <a:defRPr sz="1800" kern="1200">
+        <a:solidFill>
+          <a:schemeClr val="tx1"/>
+        </a:solidFill>
+        <a:latin typeface="+mn-lt"/>
+        <a:ea typeface="+mn-ea"/>
+        <a:cs typeface="+mn-cs"/>
+      </a:defRPr>
+    </a:lvl2pPr>
+    <a:lvl3pPr marL="914400" algn="l" defTabSz="914400" rtl="0" eaLnBrk="1" latinLnBrk="0" hangingPunct="1">
+      <a:defRPr sz="1800" kern="1200">
+        <a:solidFill>
+          <a:schemeClr val="tx1"/>
+        </a:solidFill>
+        <a:latin typeface="+mn-lt"/>
+        <a:ea typeface="+mn-ea"/>
+        <a:cs typeface="+mn-cs"/>
+      </a:defRPr>
+    </a:lvl3pPr>
+    <a:lvl4pPr marL="1371600" algn="l" defTabSz="914400" rtl="0" eaLnBrk="1" latinLnBrk="0" hangingPunct="1">
+      <a:defRPr sz="1800" kern="1200">
+        <a:solidFill>
+          <a:schemeClr val="tx1"/>
+        </a:solidFill>
+        <a:latin typeface="+mn-lt"/>
+        <a:ea typeface="+mn-ea"/>
+        <a:cs typeface="+mn-cs"/>
+      </a:defRPr>
+    </a:lvl4pPr>
+    <a:lvl5pPr marL="1828800" algn="l" defTabSz="914400" rtl="0" eaLnBrk="1" latinLnBrk="0" hangingPunct="1">
+      <a:defRPr sz="1800" kern="1200">
+        <a:solidFill>
+          <a:schemeClr val="tx1"/>
+        </a:solidFill>
+        <a:latin typeface="+mn-lt"/>
+        <a:ea typeface="+mn-ea"/>
+        <a:cs typeface="+mn-cs"/>
+      </a:defRPr>
+    </a:lvl5pPr>
+    <a:lvl6pPr marL="2286000" algn="l" defTabSz="914400" rtl="0" eaLnBrk="1" latinLnBrk="0" hangingPunct="1">
+      <a:defRPr sz="1800" kern="1200">
+        <a:solidFill>
+          <a:schemeClr val="tx1"/>
+        </a:solidFill>
+        <a:latin typeface="+mn-lt"/>
+        <a:ea typeface="+mn-ea"/>
+        <a:cs typeface="+mn-cs"/>
+      </a:defRPr>
+    </a:lvl6pPr>
+    <a:lvl7pPr marL="2743200" algn="l" defTabSz="914400" rtl="0" eaLnBrk="1" latinLnBrk="0" hangingPunct="1">
+      <a:defRPr sz="1800" kern="1200">
+        <a:solidFill>
+          <a:schemeClr val="tx1"/>
+        </a:solidFill>
+        <a:latin typeface="+mn-lt"/>
+        <a:ea typeface="+mn-ea"/>
+        <a:cs typeface="+mn-cs"/>
+      </a:defRPr>
+    </a:lvl7pPr>
+    <a:lvl8pPr marL="3200400" algn="l" defTabSz="914400" rtl="0" eaLnBrk="1" latinLnBrk="0" hangingPunct="1">
+      <a:defRPr sz="1800" kern="1200">
+        <a:solidFill>
+          <a:schemeClr val="tx1"/>
+        </a:solidFill>
+        <a:latin typeface="+mn-lt"/>
+        <a:ea typeface="+mn-ea"/>
+        <a:cs typeface="+mn-cs"/>
+      </a:defRPr>
+    </a:lvl8pPr>
+    <a:lvl9pPr marL="3657600" algn="l" defTabSz="914400" rtl="0" eaLnBrk="1" latinLnBrk="0" hangingPunct="1">
+      <a:defRPr sz="1800" kern="1200">
+        <a:solidFill>
+          <a:schemeClr val="tx1"/>
+        </a:solidFill>
+        <a:latin typeface="+mn-lt"/>
+        <a:ea typeface="+mn-ea"/>
+        <a:cs typeface="+mn-cs"/>
+      </a:defRPr>
+    </a:lvl9pPr>
+  </p:defaultTextStyle>
+  <p:extLst>
+    <p:ext uri="{EFAFB233-063F-42B5-8137-9DF3F51BA10A}">
+      <p15:sldGuideLst xmlns:p15="http://schemas.microsoft.com/office/powerpoint/2012/main"/>
+    </p:ext>
+  </p:extLst>
 </p:presentation>
 </file>
 
@@ -76,234 +148,10 @@
           <a:chExt cx="0" cy="0"/>
         </a:xfrm>
       </p:grpSpPr>
-      <p:sp>
-        <p:nvSpPr>
-          <p:cNvPr id="2" name="Header Placeholder 1"/>
-          <p:cNvSpPr>
-            <a:spLocks noGrp="1"/>
-          </p:cNvSpPr>
-          <p:nvPr>
-            <p:ph type="hdr" sz="quarter"/>
-          </p:nvPr>
-        </p:nvSpPr>
-        <p:spPr>
-          <a:xfrm>
-            <a:off x="0" y="0"/>
-            <a:ext cx="2971800" cy="458788"/>
-          </a:xfrm>
-          <a:prstGeom prst="rect">
-            <a:avLst/>
-          </a:prstGeom>
-        </p:spPr>
-        <p:txBody>
-          <a:bodyPr vert="horz" lIns="91440" tIns="45720" rIns="91440" bIns="45720" rtlCol="0"/>
-          <a:lstStyle>
-            <a:lvl1pPr algn="l">
-              <a:defRPr sz="1200"/>
-            </a:lvl1pPr>
-          </a:lstStyle>
-          <a:p>
-            <a:endParaRPr lang="en-US"/>
-          </a:p>
-        </p:txBody>
-      </p:sp>
-      <p:sp>
-        <p:nvSpPr>
-          <p:cNvPr id="3" name="Date Placeholder 2"/>
-          <p:cNvSpPr>
-            <a:spLocks noGrp="1"/>
-          </p:cNvSpPr>
-          <p:nvPr>
-            <p:ph type="dt" idx="1"/>
-          </p:nvPr>
-        </p:nvSpPr>
-        <p:spPr>
-          <a:xfrm>
-            <a:off x="3884613" y="0"/>
-            <a:ext cx="2971800" cy="458788"/>
-          </a:xfrm>
-          <a:prstGeom prst="rect">
-            <a:avLst/>
-          </a:prstGeom>
-        </p:spPr>
-        <p:txBody>
-          <a:bodyPr vert="horz" lIns="91440" tIns="45720" rIns="91440" bIns="45720" rtlCol="0"/>
-          <a:lstStyle>
-            <a:lvl1pPr algn="r">
-              <a:defRPr sz="1200"/>
-            </a:lvl1pPr>
-          </a:lstStyle>
-          <a:p>
-            <a:fld id="{5282F153-3F37-0F45-9E97-73ACFA13230C}" type="datetimeFigureOut">
-              <a:rPr lang="en-US"/>
-              <a:t>7/23/19</a:t>
-            </a:fld>
-            <a:endParaRPr lang="en-US"/>
-          </a:p>
-        </p:txBody>
-      </p:sp>
-      <p:sp>
-        <p:nvSpPr>
-          <p:cNvPr id="4" name="Slide Image Placeholder 3"/>
-          <p:cNvSpPr>
-            <a:spLocks noGrp="1" noRot="1" noChangeAspect="1"/>
-          </p:cNvSpPr>
-          <p:nvPr>
-            <p:ph type="sldImg" idx="2"/>
-          </p:nvPr>
-        </p:nvSpPr>
-        <p:spPr>
-          <a:xfrm>
-            <a:off x="685800" y="1143000"/>
-            <a:ext cx="5486400" cy="3086100"/>
-          </a:xfrm>
-          <a:prstGeom prst="rect">
-            <a:avLst/>
-          </a:prstGeom>
-          <a:noFill/>
-          <a:ln w="12700">
-            <a:solidFill>
-              <a:prstClr val="black"/>
-            </a:solidFill>
-          </a:ln>
-        </p:spPr>
-        <p:txBody>
-          <a:bodyPr vert="horz" lIns="91440" tIns="45720" rIns="91440" bIns="45720" rtlCol="0" anchor="ctr"/>
-          <a:lstStyle/>
-          <a:p>
-            <a:endParaRPr lang="en-US"/>
-          </a:p>
-        </p:txBody>
-      </p:sp>
-      <p:sp>
-        <p:nvSpPr>
-          <p:cNvPr id="5" name="Notes Placeholder 4"/>
-          <p:cNvSpPr>
-            <a:spLocks noGrp="1"/>
-          </p:cNvSpPr>
-          <p:nvPr>
-            <p:ph type="body" sz="quarter" idx="3"/>
-          </p:nvPr>
-        </p:nvSpPr>
-        <p:spPr>
-          <a:xfrm>
-            <a:off x="685800" y="4400550"/>
-            <a:ext cx="5486400" cy="3600450"/>
-          </a:xfrm>
-          <a:prstGeom prst="rect">
-            <a:avLst/>
-          </a:prstGeom>
-        </p:spPr>
-        <p:txBody>
-          <a:bodyPr vert="horz" lIns="91440" tIns="45720" rIns="91440" bIns="45720" rtlCol="0"/>
-          <a:lstStyle/>
-          <a:p>
-            <a:pPr lvl="0"/>
-            <a:r>
-              <a:rPr lang="en-US"/>
-              <a:t>Click to edit Master text styles</a:t>
-            </a:r>
-          </a:p>
-          <a:p>
-            <a:pPr lvl="1"/>
-            <a:r>
-              <a:rPr lang="en-US"/>
-              <a:t>Second level</a:t>
-            </a:r>
-          </a:p>
-          <a:p>
-            <a:pPr lvl="2"/>
-            <a:r>
-              <a:rPr lang="en-US"/>
-              <a:t>Third level</a:t>
-            </a:r>
-          </a:p>
-          <a:p>
-            <a:pPr lvl="3"/>
-            <a:r>
-              <a:rPr lang="en-US"/>
-              <a:t>Fourth level</a:t>
-            </a:r>
-          </a:p>
-          <a:p>
-            <a:pPr lvl="4"/>
-            <a:r>
-              <a:rPr lang="en-US"/>
-              <a:t>Fifth level</a:t>
-            </a:r>
-          </a:p>
-        </p:txBody>
-      </p:sp>
-      <p:sp>
-        <p:nvSpPr>
-          <p:cNvPr id="6" name="Footer Placeholder 5"/>
-          <p:cNvSpPr>
-            <a:spLocks noGrp="1"/>
-          </p:cNvSpPr>
-          <p:nvPr>
-            <p:ph type="ftr" sz="quarter" idx="4"/>
-          </p:nvPr>
-        </p:nvSpPr>
-        <p:spPr>
-          <a:xfrm>
-            <a:off x="0" y="8685213"/>
-            <a:ext cx="2971800" cy="458787"/>
-          </a:xfrm>
-          <a:prstGeom prst="rect">
-            <a:avLst/>
-          </a:prstGeom>
-        </p:spPr>
-        <p:txBody>
-          <a:bodyPr vert="horz" lIns="91440" tIns="45720" rIns="91440" bIns="45720" rtlCol="0" anchor="b"/>
-          <a:lstStyle>
-            <a:lvl1pPr algn="l">
-              <a:defRPr sz="1200"/>
-            </a:lvl1pPr>
-          </a:lstStyle>
-          <a:p>
-            <a:endParaRPr lang="en-US"/>
-          </a:p>
-        </p:txBody>
-      </p:sp>
-      <p:sp>
-        <p:nvSpPr>
-          <p:cNvPr id="7" name="Slide Number Placeholder 6"/>
-          <p:cNvSpPr>
-            <a:spLocks noGrp="1"/>
-          </p:cNvSpPr>
-          <p:nvPr>
-            <p:ph type="sldNum" sz="quarter" idx="5"/>
-          </p:nvPr>
-        </p:nvSpPr>
-        <p:spPr>
-          <a:xfrm>
-            <a:off x="3884613" y="8685213"/>
-            <a:ext cx="2971800" cy="458787"/>
-          </a:xfrm>
-          <a:prstGeom prst="rect">
-            <a:avLst/>
-          </a:prstGeom>
-        </p:spPr>
-        <p:txBody>
-          <a:bodyPr vert="horz" lIns="91440" tIns="45720" rIns="91440" bIns="45720" rtlCol="0" anchor="b"/>
-          <a:lstStyle>
-            <a:lvl1pPr algn="r">
-              <a:defRPr sz="1200"/>
-            </a:lvl1pPr>
-          </a:lstStyle>
-          <a:p>
-            <a:fld id="{CE5E9CC1-C706-0F49-92D6-E571CC5EEA8F}" type="slidenum">
-              <a:rPr lang="en-US"/>
-              <a:t>‹#›</a:t>
-            </a:fld>
-            <a:endParaRPr lang="en-US"/>
-          </a:p>
-        </p:txBody>
-      </p:sp>
     </p:spTree>
     <p:extLst>
       <p:ext uri="{BB962C8B-B14F-4D97-AF65-F5344CB8AC3E}">
-        <p14:creationId xmlns:p14="http://schemas.microsoft.com/office/powerpoint/2010/main" val="1024086991"/>
+        <p14:creationId xmlns:p14="http://schemas.microsoft.com/office/powerpoint/2010/main" val="3982741903"/>
       </p:ext>
     </p:extLst>
   </p:cSld>
@@ -447,10 +295,6 @@
           <a:bodyPr/>
           <a:lstStyle/>
           <a:p>
-            <a:r>
-              <a:rPr lang="en-US" dirty="0"/>
-              <a:t/>
-            </a:r>
             <a:endParaRPr lang="en-US" dirty="0"/>
           </a:p>
         </p:txBody>
@@ -535,10 +379,6 @@
           <a:bodyPr/>
           <a:lstStyle/>
           <a:p>
-            <a:r>
-              <a:rPr lang="en-US" dirty="0"/>
-              <a:t/>
-            </a:r>
             <a:endParaRPr lang="en-US" dirty="0"/>
           </a:p>
         </p:txBody>
@@ -623,10 +463,6 @@
           <a:bodyPr/>
           <a:lstStyle/>
           <a:p>
-            <a:r>
-              <a:rPr lang="en-US" dirty="0"/>
-              <a:t/>
-            </a:r>
             <a:endParaRPr lang="en-US" dirty="0"/>
           </a:p>
         </p:txBody>
@@ -711,10 +547,6 @@
           <a:bodyPr/>
           <a:lstStyle/>
           <a:p>
-            <a:r>
-              <a:rPr lang="en-US" dirty="0"/>
-              <a:t/>
-            </a:r>
             <a:endParaRPr lang="en-US" dirty="0"/>
           </a:p>
         </p:txBody>
@@ -799,10 +631,6 @@
           <a:bodyPr/>
           <a:lstStyle/>
           <a:p>
-            <a:r>
-              <a:rPr lang="en-US" dirty="0"/>
-              <a:t/>
-            </a:r>
             <a:endParaRPr lang="en-US" dirty="0"/>
           </a:p>
         </p:txBody>
@@ -887,10 +715,6 @@
           <a:bodyPr/>
           <a:lstStyle/>
           <a:p>
-            <a:r>
-              <a:rPr lang="en-US" dirty="0"/>
-              <a:t/>
-            </a:r>
             <a:endParaRPr lang="en-US" dirty="0"/>
           </a:p>
         </p:txBody>
@@ -997,6 +821,13 @@
           </a:solidFill>
           <a:ln/>
         </p:spPr>
+        <p:txBody>
+          <a:bodyPr/>
+          <a:lstStyle/>
+          <a:p>
+            <a:endParaRPr lang="en-US"/>
+          </a:p>
+        </p:txBody>
       </p:sp>
       <p:sp>
         <p:nvSpPr>
@@ -1017,11 +848,18 @@
           </a:solidFill>
           <a:ln/>
         </p:spPr>
+        <p:txBody>
+          <a:bodyPr/>
+          <a:lstStyle/>
+          <a:p>
+            <a:endParaRPr lang="en-US"/>
+          </a:p>
+        </p:txBody>
       </p:sp>
       <p:pic>
         <p:nvPicPr>
           <p:cNvPr id="4" name="Image 0" descr="preencoded.png">
-            <a:hlinkClick r:id="rId2" tooltip=""/>
+            <a:hlinkClick r:id="rId2"/>
           </p:cNvPr>
           <p:cNvPicPr>
             <a:picLocks noChangeAspect="1"/>
@@ -1029,7 +867,7 @@
           <p:nvPr/>
         </p:nvPicPr>
         <p:blipFill>
-          <a:blip r:embed="rId1"/>
+          <a:blip r:embed="rId3"/>
           <a:stretch>
             <a:fillRect/>
           </a:stretch>
@@ -1112,7 +950,7 @@
       <p:pic>
         <p:nvPicPr>
           <p:cNvPr id="4" name="Image 0" descr="preencoded.png">
-            <a:hlinkClick r:id="rId2" tooltip=""/>
+            <a:hlinkClick r:id="rId2"/>
           </p:cNvPr>
           <p:cNvPicPr>
             <a:picLocks noChangeAspect="1"/>
@@ -1120,7 +958,7 @@
           <p:nvPr/>
         </p:nvPicPr>
         <p:blipFill>
-          <a:blip r:embed="rId1"/>
+          <a:blip r:embed="rId3"/>
           <a:stretch>
             <a:fillRect/>
           </a:stretch>
@@ -1203,7 +1041,7 @@
       <p:pic>
         <p:nvPicPr>
           <p:cNvPr id="4" name="Image 0" descr="preencoded.png">
-            <a:hlinkClick r:id="rId2" tooltip=""/>
+            <a:hlinkClick r:id="rId2"/>
           </p:cNvPr>
           <p:cNvPicPr>
             <a:picLocks noChangeAspect="1"/>
@@ -1211,7 +1049,7 @@
           <p:nvPr/>
         </p:nvPicPr>
         <p:blipFill>
-          <a:blip r:embed="rId1"/>
+          <a:blip r:embed="rId3"/>
           <a:stretch>
             <a:fillRect/>
           </a:stretch>
@@ -1294,7 +1132,7 @@
       <p:pic>
         <p:nvPicPr>
           <p:cNvPr id="4" name="Image 0" descr="preencoded.png">
-            <a:hlinkClick r:id="rId2" tooltip=""/>
+            <a:hlinkClick r:id="rId2"/>
           </p:cNvPr>
           <p:cNvPicPr>
             <a:picLocks noChangeAspect="1"/>
@@ -1302,7 +1140,7 @@
           <p:nvPr/>
         </p:nvPicPr>
         <p:blipFill>
-          <a:blip r:embed="rId1"/>
+          <a:blip r:embed="rId3"/>
           <a:stretch>
             <a:fillRect/>
           </a:stretch>
@@ -1385,7 +1223,7 @@
       <p:pic>
         <p:nvPicPr>
           <p:cNvPr id="4" name="Image 0" descr="preencoded.png">
-            <a:hlinkClick r:id="rId2" tooltip=""/>
+            <a:hlinkClick r:id="rId2"/>
           </p:cNvPr>
           <p:cNvPicPr>
             <a:picLocks noChangeAspect="1"/>
@@ -1393,7 +1231,7 @@
           <p:nvPr/>
         </p:nvPicPr>
         <p:blipFill>
-          <a:blip r:embed="rId1"/>
+          <a:blip r:embed="rId3"/>
           <a:stretch>
             <a:fillRect/>
           </a:stretch>
@@ -1476,7 +1314,7 @@
       <p:pic>
         <p:nvPicPr>
           <p:cNvPr id="4" name="Image 0" descr="preencoded.png">
-            <a:hlinkClick r:id="rId2" tooltip=""/>
+            <a:hlinkClick r:id="rId2"/>
           </p:cNvPr>
           <p:cNvPicPr>
             <a:picLocks noChangeAspect="1"/>
@@ -1484,7 +1322,7 @@
           <p:nvPr/>
         </p:nvPicPr>
         <p:blipFill>
-          <a:blip r:embed="rId1"/>
+          <a:blip r:embed="rId3"/>
           <a:stretch>
             <a:fillRect/>
           </a:stretch>
@@ -1510,6 +1348,11 @@
 <file path=ppt/slideMasters/slideMaster1.xml><?xml version="1.0" encoding="utf-8"?>
 <p:sldMaster xmlns:a="http://schemas.openxmlformats.org/drawingml/2006/main" xmlns:r="http://schemas.openxmlformats.org/officeDocument/2006/relationships" xmlns:p="http://schemas.openxmlformats.org/presentationml/2006/main">
   <p:cSld>
+    <p:bg>
+      <p:bgRef idx="1001">
+        <a:schemeClr val="bg1"/>
+      </p:bgRef>
+    </p:bg>
     <p:spTree>
       <p:nvGrpSpPr>
         <p:cNvPr id="1" name=""/>
@@ -1809,14 +1652,14 @@
       </p:grpSpPr>
       <p:pic>
         <p:nvPicPr>
-          <p:cNvPr id="2" name="Image 0" descr="preencoded.png">    </p:cNvPr>
+          <p:cNvPr id="2" name="Image 0" descr="preencoded.png"/>
           <p:cNvPicPr>
             <a:picLocks noChangeAspect="1"/>
           </p:cNvPicPr>
           <p:nvPr/>
         </p:nvPicPr>
         <p:blipFill>
-          <a:blip r:embed="rId1"/>
+          <a:blip r:embed="rId3"/>
           <a:stretch>
             <a:fillRect/>
           </a:stretch>
@@ -1852,7 +1695,7 @@
           <a:bodyPr wrap="square" lIns="0" tIns="0" rIns="0" bIns="0" rtlCol="0" anchor="t"/>
           <a:lstStyle/>
           <a:p>
-            <a:pPr algn="l" indent="0" marL="0">
+            <a:pPr marL="0" indent="0" algn="l">
               <a:lnSpc>
                 <a:spcPts val="5350"/>
               </a:lnSpc>
@@ -1894,7 +1737,7 @@
           <a:bodyPr wrap="square" lIns="0" tIns="0" rIns="0" bIns="0" rtlCol="0" anchor="t"/>
           <a:lstStyle/>
           <a:p>
-            <a:pPr algn="l" indent="0" marL="0">
+            <a:pPr marL="0" indent="0" algn="l">
               <a:lnSpc>
                 <a:spcPts val="2500"/>
               </a:lnSpc>
@@ -1911,12 +1754,6 @@
               </a:rPr>
               <a:t>Predicting house prices using the </a:t>
             </a:r>
-            <a:pPr algn="l" indent="0" marL="0">
-              <a:lnSpc>
-                <a:spcPts val="2500"/>
-              </a:lnSpc>
-              <a:buNone/>
-            </a:pPr>
             <a:r>
               <a:rPr lang="en-US" sz="1550" b="1" dirty="0">
                 <a:solidFill>
@@ -1928,12 +1765,6 @@
               </a:rPr>
               <a:t>Kaggle House Prices: Advanced Regression Techniques</a:t>
             </a:r>
-            <a:pPr algn="l" indent="0" marL="0">
-              <a:lnSpc>
-                <a:spcPts val="2500"/>
-              </a:lnSpc>
-              <a:buNone/>
-            </a:pPr>
             <a:r>
               <a:rPr lang="en-US" sz="1550" dirty="0">
                 <a:solidFill>
@@ -1975,6 +1806,13 @@
             <a:prstDash val="solid"/>
           </a:ln>
         </p:spPr>
+        <p:txBody>
+          <a:bodyPr/>
+          <a:lstStyle/>
+          <a:p>
+            <a:endParaRPr lang="en-US"/>
+          </a:p>
+        </p:txBody>
       </p:sp>
       <p:sp>
         <p:nvSpPr>
@@ -1997,7 +1835,7 @@
           <a:bodyPr wrap="none" lIns="0" tIns="0" rIns="0" bIns="0" rtlCol="0" anchor="t"/>
           <a:lstStyle/>
           <a:p>
-            <a:pPr algn="l" indent="0" marL="0">
+            <a:pPr marL="0" indent="0" algn="l">
               <a:lnSpc>
                 <a:spcPts val="2650"/>
               </a:lnSpc>
@@ -2039,7 +1877,7 @@
           <a:bodyPr wrap="square" lIns="0" tIns="0" rIns="0" bIns="0" rtlCol="0" anchor="t"/>
           <a:lstStyle/>
           <a:p>
-            <a:pPr algn="l" indent="0" marL="0">
+            <a:pPr marL="0" indent="0" algn="l">
               <a:lnSpc>
                 <a:spcPts val="2500"/>
               </a:lnSpc>
@@ -2086,6 +1924,13 @@
             <a:prstDash val="solid"/>
           </a:ln>
         </p:spPr>
+        <p:txBody>
+          <a:bodyPr/>
+          <a:lstStyle/>
+          <a:p>
+            <a:endParaRPr lang="en-US"/>
+          </a:p>
+        </p:txBody>
       </p:sp>
       <p:sp>
         <p:nvSpPr>
@@ -2108,7 +1953,7 @@
           <a:bodyPr wrap="none" lIns="0" tIns="0" rIns="0" bIns="0" rtlCol="0" anchor="t"/>
           <a:lstStyle/>
           <a:p>
-            <a:pPr algn="l" indent="0" marL="0">
+            <a:pPr marL="0" indent="0" algn="l">
               <a:lnSpc>
                 <a:spcPts val="2650"/>
               </a:lnSpc>
@@ -2150,7 +1995,7 @@
           <a:bodyPr wrap="square" lIns="0" tIns="0" rIns="0" bIns="0" rtlCol="0" anchor="t"/>
           <a:lstStyle/>
           <a:p>
-            <a:pPr algn="l" indent="0" marL="0">
+            <a:pPr marL="0" indent="0" algn="l">
               <a:lnSpc>
                 <a:spcPts val="2500"/>
               </a:lnSpc>
@@ -2197,6 +2042,13 @@
             <a:prstDash val="solid"/>
           </a:ln>
         </p:spPr>
+        <p:txBody>
+          <a:bodyPr/>
+          <a:lstStyle/>
+          <a:p>
+            <a:endParaRPr lang="en-US"/>
+          </a:p>
+        </p:txBody>
       </p:sp>
       <p:sp>
         <p:nvSpPr>
@@ -2219,7 +2071,7 @@
           <a:bodyPr wrap="none" lIns="0" tIns="0" rIns="0" bIns="0" rtlCol="0" anchor="t"/>
           <a:lstStyle/>
           <a:p>
-            <a:pPr algn="l" indent="0" marL="0">
+            <a:pPr marL="0" indent="0" algn="l">
               <a:lnSpc>
                 <a:spcPts val="2650"/>
               </a:lnSpc>
@@ -2261,7 +2113,7 @@
           <a:bodyPr wrap="square" lIns="0" tIns="0" rIns="0" bIns="0" rtlCol="0" anchor="t"/>
           <a:lstStyle/>
           <a:p>
-            <a:pPr algn="l" indent="0" marL="0">
+            <a:pPr marL="0" indent="0" algn="l">
               <a:lnSpc>
                 <a:spcPts val="2500"/>
               </a:lnSpc>
@@ -2328,7 +2180,7 @@
           <a:bodyPr wrap="none" lIns="0" tIns="0" rIns="0" bIns="0" rtlCol="0" anchor="t"/>
           <a:lstStyle/>
           <a:p>
-            <a:pPr algn="l" indent="0" marL="0">
+            <a:pPr marL="0" indent="0" algn="l">
               <a:lnSpc>
                 <a:spcPts val="5200"/>
               </a:lnSpc>
@@ -2370,6 +2222,13 @@
           </a:solidFill>
           <a:ln/>
         </p:spPr>
+        <p:txBody>
+          <a:bodyPr/>
+          <a:lstStyle/>
+          <a:p>
+            <a:endParaRPr lang="en-US"/>
+          </a:p>
+        </p:txBody>
       </p:sp>
       <p:sp>
         <p:nvSpPr>
@@ -2392,7 +2251,7 @@
           <a:bodyPr wrap="none" lIns="0" tIns="0" rIns="0" bIns="0" rtlCol="0" anchor="t"/>
           <a:lstStyle/>
           <a:p>
-            <a:pPr algn="l" indent="0" marL="0">
+            <a:pPr marL="0" indent="0" algn="l">
               <a:lnSpc>
                 <a:spcPts val="2600"/>
               </a:lnSpc>
@@ -2434,7 +2293,7 @@
           <a:bodyPr wrap="square" lIns="0" tIns="0" rIns="0" bIns="0" rtlCol="0" anchor="t"/>
           <a:lstStyle/>
           <a:p>
-            <a:pPr algn="l" marL="342900" indent="-342900">
+            <a:pPr marL="342900" indent="-342900" algn="l">
               <a:lnSpc>
                 <a:spcPts val="2350"/>
               </a:lnSpc>
@@ -2455,7 +2314,7 @@
             <a:endParaRPr lang="en-US" sz="1500" dirty="0"/>
           </a:p>
           <a:p>
-            <a:pPr algn="l" marL="342900" indent="-342900">
+            <a:pPr marL="342900" indent="-342900" algn="l">
               <a:lnSpc>
                 <a:spcPts val="2350"/>
               </a:lnSpc>
@@ -2476,7 +2335,7 @@
             <a:endParaRPr lang="en-US" sz="1500" dirty="0"/>
           </a:p>
           <a:p>
-            <a:pPr algn="l" marL="342900" indent="-342900">
+            <a:pPr marL="342900" indent="-342900" algn="l">
               <a:lnSpc>
                 <a:spcPts val="2350"/>
               </a:lnSpc>
@@ -2494,12 +2353,6 @@
               </a:rPr>
               <a:t>Log transform: </a:t>
             </a:r>
-            <a:pPr algn="l" indent="0" marL="0">
-              <a:lnSpc>
-                <a:spcPts val="2350"/>
-              </a:lnSpc>
-              <a:buNone/>
-            </a:pPr>
             <a:r>
               <a:rPr lang="en-US" sz="1500" b="1" dirty="0">
                 <a:solidFill>
@@ -2514,7 +2367,7 @@
             <a:endParaRPr lang="en-US" sz="1500" dirty="0"/>
           </a:p>
           <a:p>
-            <a:pPr algn="l" marL="342900" indent="-342900">
+            <a:pPr marL="342900" indent="-342900" algn="l">
               <a:lnSpc>
                 <a:spcPts val="2350"/>
               </a:lnSpc>
@@ -2532,12 +2385,6 @@
               </a:rPr>
               <a:t>Predictions back-converted: </a:t>
             </a:r>
-            <a:pPr algn="l" indent="0" marL="0">
-              <a:lnSpc>
-                <a:spcPts val="2350"/>
-              </a:lnSpc>
-              <a:buNone/>
-            </a:pPr>
             <a:r>
               <a:rPr lang="en-US" sz="1500" b="1" dirty="0">
                 <a:solidFill>
@@ -2574,7 +2421,7 @@
           <a:bodyPr wrap="none" lIns="0" tIns="0" rIns="0" bIns="0" rtlCol="0" anchor="t"/>
           <a:lstStyle/>
           <a:p>
-            <a:pPr algn="l" indent="0" marL="0">
+            <a:pPr marL="0" indent="0" algn="l">
               <a:lnSpc>
                 <a:spcPts val="2600"/>
               </a:lnSpc>
@@ -2597,17 +2444,17 @@
       </p:sp>
       <p:pic>
         <p:nvPicPr>
-          <p:cNvPr id="7" name="Image 0" descr="preencoded.png">    </p:cNvPr>
+          <p:cNvPr id="7" name="Image 0" descr="preencoded.png"/>
           <p:cNvPicPr>
             <a:picLocks noChangeAspect="1"/>
           </p:cNvPicPr>
           <p:nvPr/>
         </p:nvPicPr>
         <p:blipFill>
-          <a:blip r:embed="rId1">
+          <a:blip>
             <a:extLst>
               <a:ext uri="{96DAC541-7B7A-43D3-8B79-37D633B846F1}">
-                <asvg:svgBlip xmlns:asvg="http://schemas.microsoft.com/office/drawing/2016/SVG/main" r:embed="rId2"/>
+                <asvg:svgBlip xmlns:asvg="http://schemas.microsoft.com/office/drawing/2016/SVG/main" r:embed="rId3"/>
               </a:ext>
             </a:extLst>
           </a:blip>
@@ -2646,7 +2493,7 @@
           <a:bodyPr wrap="none" lIns="0" tIns="0" rIns="0" bIns="0" rtlCol="0" anchor="t"/>
           <a:lstStyle/>
           <a:p>
-            <a:pPr algn="l" indent="0" marL="0">
+            <a:pPr marL="0" indent="0" algn="l">
               <a:lnSpc>
                 <a:spcPts val="2600"/>
               </a:lnSpc>
@@ -2688,7 +2535,7 @@
           <a:bodyPr wrap="none" lIns="0" tIns="0" rIns="0" bIns="0" rtlCol="0" anchor="t"/>
           <a:lstStyle/>
           <a:p>
-            <a:pPr algn="l" indent="0" marL="0">
+            <a:pPr marL="0" indent="0" algn="l">
               <a:lnSpc>
                 <a:spcPts val="2350"/>
               </a:lnSpc>
@@ -2711,17 +2558,17 @@
       </p:sp>
       <p:pic>
         <p:nvPicPr>
-          <p:cNvPr id="10" name="Image 1" descr="preencoded.png">    </p:cNvPr>
+          <p:cNvPr id="10" name="Image 1" descr="preencoded.png"/>
           <p:cNvPicPr>
             <a:picLocks noChangeAspect="1"/>
           </p:cNvPicPr>
           <p:nvPr/>
         </p:nvPicPr>
         <p:blipFill>
-          <a:blip r:embed="rId3">
+          <a:blip>
             <a:extLst>
               <a:ext uri="{96DAC541-7B7A-43D3-8B79-37D633B846F1}">
-                <asvg:svgBlip xmlns:asvg="http://schemas.microsoft.com/office/drawing/2016/SVG/main" r:embed="rId4"/>
+                <asvg:svgBlip xmlns:asvg="http://schemas.microsoft.com/office/drawing/2016/SVG/main" r:embed="rId3"/>
               </a:ext>
             </a:extLst>
           </a:blip>
@@ -2760,7 +2607,7 @@
           <a:bodyPr wrap="none" lIns="0" tIns="0" rIns="0" bIns="0" rtlCol="0" anchor="t"/>
           <a:lstStyle/>
           <a:p>
-            <a:pPr algn="l" indent="0" marL="0">
+            <a:pPr marL="0" indent="0" algn="l">
               <a:lnSpc>
                 <a:spcPts val="2600"/>
               </a:lnSpc>
@@ -2802,7 +2649,7 @@
           <a:bodyPr wrap="none" lIns="0" tIns="0" rIns="0" bIns="0" rtlCol="0" anchor="t"/>
           <a:lstStyle/>
           <a:p>
-            <a:pPr algn="l" indent="0" marL="0">
+            <a:pPr marL="0" indent="0" algn="l">
               <a:lnSpc>
                 <a:spcPts val="2350"/>
               </a:lnSpc>
@@ -2825,17 +2672,17 @@
       </p:sp>
       <p:pic>
         <p:nvPicPr>
-          <p:cNvPr id="13" name="Image 2" descr="preencoded.png">    </p:cNvPr>
+          <p:cNvPr id="13" name="Image 2" descr="preencoded.png"/>
           <p:cNvPicPr>
             <a:picLocks noChangeAspect="1"/>
           </p:cNvPicPr>
           <p:nvPr/>
         </p:nvPicPr>
         <p:blipFill>
-          <a:blip r:embed="rId5">
+          <a:blip>
             <a:extLst>
               <a:ext uri="{96DAC541-7B7A-43D3-8B79-37D633B846F1}">
-                <asvg:svgBlip xmlns:asvg="http://schemas.microsoft.com/office/drawing/2016/SVG/main" r:embed="rId6"/>
+                <asvg:svgBlip xmlns:asvg="http://schemas.microsoft.com/office/drawing/2016/SVG/main" r:embed="rId3"/>
               </a:ext>
             </a:extLst>
           </a:blip>
@@ -2874,7 +2721,7 @@
           <a:bodyPr wrap="none" lIns="0" tIns="0" rIns="0" bIns="0" rtlCol="0" anchor="t"/>
           <a:lstStyle/>
           <a:p>
-            <a:pPr algn="l" indent="0" marL="0">
+            <a:pPr marL="0" indent="0" algn="l">
               <a:lnSpc>
                 <a:spcPts val="2600"/>
               </a:lnSpc>
@@ -2916,7 +2763,7 @@
           <a:bodyPr wrap="none" lIns="0" tIns="0" rIns="0" bIns="0" rtlCol="0" anchor="t"/>
           <a:lstStyle/>
           <a:p>
-            <a:pPr algn="l" indent="0" marL="0">
+            <a:pPr marL="0" indent="0" algn="l">
               <a:lnSpc>
                 <a:spcPts val="2350"/>
               </a:lnSpc>
@@ -2939,17 +2786,17 @@
       </p:sp>
       <p:pic>
         <p:nvPicPr>
-          <p:cNvPr id="16" name="Image 3" descr="preencoded.png">    </p:cNvPr>
+          <p:cNvPr id="16" name="Image 3" descr="preencoded.png"/>
           <p:cNvPicPr>
             <a:picLocks noChangeAspect="1"/>
           </p:cNvPicPr>
           <p:nvPr/>
         </p:nvPicPr>
         <p:blipFill>
-          <a:blip r:embed="rId7">
+          <a:blip>
             <a:extLst>
               <a:ext uri="{96DAC541-7B7A-43D3-8B79-37D633B846F1}">
-                <asvg:svgBlip xmlns:asvg="http://schemas.microsoft.com/office/drawing/2016/SVG/main" r:embed="rId8"/>
+                <asvg:svgBlip xmlns:asvg="http://schemas.microsoft.com/office/drawing/2016/SVG/main" r:embed="rId3"/>
               </a:ext>
             </a:extLst>
           </a:blip>
@@ -2988,7 +2835,7 @@
           <a:bodyPr wrap="none" lIns="0" tIns="0" rIns="0" bIns="0" rtlCol="0" anchor="t"/>
           <a:lstStyle/>
           <a:p>
-            <a:pPr algn="l" indent="0" marL="0">
+            <a:pPr marL="0" indent="0" algn="l">
               <a:lnSpc>
                 <a:spcPts val="2600"/>
               </a:lnSpc>
@@ -3030,7 +2877,7 @@
           <a:bodyPr wrap="square" lIns="0" tIns="0" rIns="0" bIns="0" rtlCol="0" anchor="t"/>
           <a:lstStyle/>
           <a:p>
-            <a:pPr algn="l" indent="0" marL="0">
+            <a:pPr marL="0" indent="0" algn="l">
               <a:lnSpc>
                 <a:spcPts val="2350"/>
               </a:lnSpc>
@@ -3072,7 +2919,7 @@
           <a:bodyPr wrap="none" lIns="0" tIns="0" rIns="0" bIns="0" rtlCol="0" anchor="t"/>
           <a:lstStyle/>
           <a:p>
-            <a:pPr algn="l" indent="0" marL="0">
+            <a:pPr marL="0" indent="0" algn="l">
               <a:lnSpc>
                 <a:spcPts val="2350"/>
               </a:lnSpc>
@@ -3089,12 +2936,6 @@
               </a:rPr>
               <a:t>All models evaluated with </a:t>
             </a:r>
-            <a:pPr algn="l" indent="0" marL="0">
-              <a:lnSpc>
-                <a:spcPts val="2350"/>
-              </a:lnSpc>
-              <a:buNone/>
-            </a:pPr>
             <a:r>
               <a:rPr lang="en-US" sz="1500" b="1" dirty="0">
                 <a:solidFill>
@@ -3106,12 +2947,6 @@
               </a:rPr>
               <a:t>5-fold cross-validation</a:t>
             </a:r>
-            <a:pPr algn="l" indent="0" marL="0">
-              <a:lnSpc>
-                <a:spcPts val="2350"/>
-              </a:lnSpc>
-              <a:buNone/>
-            </a:pPr>
             <a:r>
               <a:rPr lang="en-US" sz="1500" dirty="0">
                 <a:solidFill>
@@ -3123,12 +2958,6 @@
               </a:rPr>
               <a:t> and </a:t>
             </a:r>
-            <a:pPr algn="l" indent="0" marL="0">
-              <a:lnSpc>
-                <a:spcPts val="2350"/>
-              </a:lnSpc>
-              <a:buNone/>
-            </a:pPr>
             <a:r>
               <a:rPr lang="en-US" sz="1500" b="1" dirty="0">
                 <a:solidFill>
@@ -3140,12 +2969,6 @@
               </a:rPr>
               <a:t>RMSE</a:t>
             </a:r>
-            <a:pPr algn="l" indent="0" marL="0">
-              <a:lnSpc>
-                <a:spcPts val="2350"/>
-              </a:lnSpc>
-              <a:buNone/>
-            </a:pPr>
             <a:r>
               <a:rPr lang="en-US" sz="1500" dirty="0">
                 <a:solidFill>
@@ -3207,7 +3030,7 @@
           <a:bodyPr wrap="none" lIns="0" tIns="0" rIns="0" bIns="0" rtlCol="0" anchor="t"/>
           <a:lstStyle/>
           <a:p>
-            <a:pPr algn="l" indent="0" marL="0">
+            <a:pPr marL="0" indent="0" algn="l">
               <a:lnSpc>
                 <a:spcPts val="4500"/>
               </a:lnSpc>
@@ -3249,7 +3072,7 @@
           <a:bodyPr wrap="none" lIns="0" tIns="0" rIns="0" bIns="0" rtlCol="0" anchor="t"/>
           <a:lstStyle/>
           <a:p>
-            <a:pPr algn="ctr" indent="0" marL="0">
+            <a:pPr marL="0" indent="0" algn="ctr">
               <a:lnSpc>
                 <a:spcPts val="4350"/>
               </a:lnSpc>
@@ -3291,7 +3114,7 @@
           <a:bodyPr wrap="none" lIns="0" tIns="0" rIns="0" bIns="0" rtlCol="0" anchor="t"/>
           <a:lstStyle/>
           <a:p>
-            <a:pPr algn="ctr" indent="0" marL="0">
+            <a:pPr marL="0" indent="0" algn="ctr">
               <a:lnSpc>
                 <a:spcPts val="2250"/>
               </a:lnSpc>
@@ -3333,7 +3156,7 @@
           <a:bodyPr wrap="none" lIns="0" tIns="0" rIns="0" bIns="0" rtlCol="0" anchor="t"/>
           <a:lstStyle/>
           <a:p>
-            <a:pPr algn="ctr" indent="0" marL="0">
+            <a:pPr marL="0" indent="0" algn="ctr">
               <a:lnSpc>
                 <a:spcPts val="1900"/>
               </a:lnSpc>
@@ -3375,7 +3198,7 @@
           <a:bodyPr wrap="none" lIns="0" tIns="0" rIns="0" bIns="0" rtlCol="0" anchor="t"/>
           <a:lstStyle/>
           <a:p>
-            <a:pPr algn="ctr" indent="0" marL="0">
+            <a:pPr marL="0" indent="0" algn="ctr">
               <a:lnSpc>
                 <a:spcPts val="4350"/>
               </a:lnSpc>
@@ -3417,7 +3240,7 @@
           <a:bodyPr wrap="none" lIns="0" tIns="0" rIns="0" bIns="0" rtlCol="0" anchor="t"/>
           <a:lstStyle/>
           <a:p>
-            <a:pPr algn="ctr" indent="0" marL="0">
+            <a:pPr marL="0" indent="0" algn="ctr">
               <a:lnSpc>
                 <a:spcPts val="2250"/>
               </a:lnSpc>
@@ -3459,7 +3282,7 @@
           <a:bodyPr wrap="none" lIns="0" tIns="0" rIns="0" bIns="0" rtlCol="0" anchor="t"/>
           <a:lstStyle/>
           <a:p>
-            <a:pPr algn="ctr" indent="0" marL="0">
+            <a:pPr marL="0" indent="0" algn="ctr">
               <a:lnSpc>
                 <a:spcPts val="1900"/>
               </a:lnSpc>
@@ -3501,7 +3324,7 @@
           <a:bodyPr wrap="none" lIns="0" tIns="0" rIns="0" bIns="0" rtlCol="0" anchor="t"/>
           <a:lstStyle/>
           <a:p>
-            <a:pPr algn="ctr" indent="0" marL="0">
+            <a:pPr marL="0" indent="0" algn="ctr">
               <a:lnSpc>
                 <a:spcPts val="4350"/>
               </a:lnSpc>
@@ -3543,7 +3366,7 @@
           <a:bodyPr wrap="none" lIns="0" tIns="0" rIns="0" bIns="0" rtlCol="0" anchor="t"/>
           <a:lstStyle/>
           <a:p>
-            <a:pPr algn="ctr" indent="0" marL="0">
+            <a:pPr marL="0" indent="0" algn="ctr">
               <a:lnSpc>
                 <a:spcPts val="2250"/>
               </a:lnSpc>
@@ -3585,7 +3408,7 @@
           <a:bodyPr wrap="none" lIns="0" tIns="0" rIns="0" bIns="0" rtlCol="0" anchor="t"/>
           <a:lstStyle/>
           <a:p>
-            <a:pPr algn="ctr" indent="0" marL="0">
+            <a:pPr marL="0" indent="0" algn="ctr">
               <a:lnSpc>
                 <a:spcPts val="1900"/>
               </a:lnSpc>
@@ -3608,14 +3431,14 @@
       </p:sp>
       <p:pic>
         <p:nvPicPr>
-          <p:cNvPr id="12" name="Image 0" descr="preencoded.png">    </p:cNvPr>
+          <p:cNvPr id="12" name="Image 0" descr="preencoded.png"/>
           <p:cNvPicPr>
             <a:picLocks noChangeAspect="1"/>
           </p:cNvPicPr>
           <p:nvPr/>
         </p:nvPicPr>
         <p:blipFill>
-          <a:blip r:embed="rId1"/>
+          <a:blip r:embed="rId3"/>
           <a:stretch>
             <a:fillRect/>
           </a:stretch>
@@ -3651,17 +3474,24 @@
           </a:solidFill>
           <a:ln/>
         </p:spPr>
+        <p:txBody>
+          <a:bodyPr/>
+          <a:lstStyle/>
+          <a:p>
+            <a:endParaRPr lang="en-US"/>
+          </a:p>
+        </p:txBody>
       </p:sp>
       <p:pic>
         <p:nvPicPr>
-          <p:cNvPr id="14" name="Image 1" descr="preencoded.png">    </p:cNvPr>
+          <p:cNvPr id="14" name="Image 1" descr="preencoded.png"/>
           <p:cNvPicPr>
             <a:picLocks noChangeAspect="1"/>
           </p:cNvPicPr>
           <p:nvPr/>
         </p:nvPicPr>
         <p:blipFill>
-          <a:blip r:embed="rId2"/>
+          <a:blip r:embed="rId4"/>
           <a:stretch>
             <a:fillRect/>
           </a:stretch>
@@ -3697,7 +3527,7 @@
           <a:bodyPr wrap="square" lIns="0" tIns="0" rIns="0" bIns="0" rtlCol="0" anchor="t"/>
           <a:lstStyle/>
           <a:p>
-            <a:pPr algn="l" indent="0" marL="0">
+            <a:pPr marL="0" indent="0" algn="l">
               <a:lnSpc>
                 <a:spcPts val="1900"/>
               </a:lnSpc>
@@ -3764,7 +3594,7 @@
           <a:bodyPr wrap="none" lIns="0" tIns="0" rIns="0" bIns="0" rtlCol="0" anchor="t"/>
           <a:lstStyle/>
           <a:p>
-            <a:pPr algn="l" indent="0" marL="0">
+            <a:pPr marL="0" indent="0" algn="l">
               <a:lnSpc>
                 <a:spcPts val="3400"/>
               </a:lnSpc>
@@ -3787,223 +3617,7 @@
       </p:sp>
       <p:pic>
         <p:nvPicPr>
-          <p:cNvPr id="3" name="Image 0" descr="preencoded.png">    </p:cNvPr>
-          <p:cNvPicPr>
-            <a:picLocks noChangeAspect="1"/>
-          </p:cNvPicPr>
-          <p:nvPr/>
-        </p:nvPicPr>
-        <p:blipFill>
-          <a:blip r:embed="rId1"/>
-          <a:stretch>
-            <a:fillRect/>
-          </a:stretch>
-        </p:blipFill>
-        <p:spPr>
-          <a:xfrm>
-            <a:off x="2760345" y="977146"/>
-            <a:ext cx="2357438" cy="2357438"/>
-          </a:xfrm>
-          <a:prstGeom prst="rect">
-            <a:avLst/>
-          </a:prstGeom>
-        </p:spPr>
-      </p:pic>
-      <p:sp>
-        <p:nvSpPr>
-          <p:cNvPr id="4" name="Text 1"/>
-          <p:cNvSpPr/>
-          <p:nvPr/>
-        </p:nvSpPr>
-        <p:spPr>
-          <a:xfrm>
-            <a:off x="3064907" y="3436382"/>
-            <a:ext cx="1748195" cy="218480"/>
-          </a:xfrm>
-          <a:prstGeom prst="rect">
-            <a:avLst/>
-          </a:prstGeom>
-          <a:noFill/>
-          <a:ln/>
-        </p:spPr>
-        <p:txBody>
-          <a:bodyPr wrap="none" lIns="0" tIns="0" rIns="0" bIns="0" rtlCol="0" anchor="t"/>
-          <a:lstStyle/>
-          <a:p>
-            <a:pPr algn="ctr" indent="0" marL="0">
-              <a:lnSpc>
-                <a:spcPts val="1700"/>
-              </a:lnSpc>
-              <a:buNone/>
-            </a:pPr>
-            <a:r>
-              <a:rPr lang="en-US" sz="1350" b="1" dirty="0">
-                <a:solidFill>
-                  <a:srgbClr val="272525"/>
-                </a:solidFill>
-                <a:latin typeface="Petrona Bold" pitchFamily="34" charset="0"/>
-                <a:ea typeface="Petrona Bold" pitchFamily="34" charset="-122"/>
-                <a:cs typeface="Petrona Bold" pitchFamily="34" charset="-120"/>
-              </a:rPr>
-              <a:t>RMSE Across Folds</a:t>
-            </a:r>
-            <a:endParaRPr lang="en-US" sz="1350" dirty="0"/>
-          </a:p>
-        </p:txBody>
-      </p:sp>
-      <p:sp>
-        <p:nvSpPr>
-          <p:cNvPr id="5" name="Text 2"/>
-          <p:cNvSpPr/>
-          <p:nvPr/>
-        </p:nvSpPr>
-        <p:spPr>
-          <a:xfrm>
-            <a:off x="2301954" y="3703677"/>
-            <a:ext cx="3274219" cy="500420"/>
-          </a:xfrm>
-          <a:prstGeom prst="rect">
-            <a:avLst/>
-          </a:prstGeom>
-          <a:noFill/>
-          <a:ln/>
-        </p:spPr>
-        <p:txBody>
-          <a:bodyPr wrap="square" lIns="0" tIns="0" rIns="0" bIns="0" rtlCol="0" anchor="t"/>
-          <a:lstStyle/>
-          <a:p>
-            <a:pPr algn="ctr" indent="0" marL="0">
-              <a:lnSpc>
-                <a:spcPts val="1300"/>
-              </a:lnSpc>
-              <a:buNone/>
-            </a:pPr>
-            <a:r>
-              <a:rPr lang="en-US" sz="1000" dirty="0">
-                <a:solidFill>
-                  <a:srgbClr val="272525"/>
-                </a:solidFill>
-                <a:latin typeface="Inter" pitchFamily="34" charset="0"/>
-                <a:ea typeface="Inter" pitchFamily="34" charset="-122"/>
-                <a:cs typeface="Inter" pitchFamily="34" charset="-120"/>
-              </a:rPr>
-              <a:t>GB is consistently lower across all folds. Ridge &amp; Lasso show large spikes — indicating instability and underfitting.</a:t>
-            </a:r>
-            <a:endParaRPr lang="en-US" sz="1000" dirty="0"/>
-          </a:p>
-        </p:txBody>
-      </p:sp>
-      <p:pic>
-        <p:nvPicPr>
-          <p:cNvPr id="6" name="Image 1" descr="preencoded.png">    </p:cNvPr>
-          <p:cNvPicPr>
-            <a:picLocks noChangeAspect="1"/>
-          </p:cNvPicPr>
-          <p:nvPr/>
-        </p:nvPicPr>
-        <p:blipFill>
-          <a:blip r:embed="rId2"/>
-          <a:stretch>
-            <a:fillRect/>
-          </a:stretch>
-        </p:blipFill>
-        <p:spPr>
-          <a:xfrm>
-            <a:off x="6136362" y="977146"/>
-            <a:ext cx="2357438" cy="2357438"/>
-          </a:xfrm>
-          <a:prstGeom prst="rect">
-            <a:avLst/>
-          </a:prstGeom>
-        </p:spPr>
-      </p:pic>
-      <p:sp>
-        <p:nvSpPr>
-          <p:cNvPr id="7" name="Text 3"/>
-          <p:cNvSpPr/>
-          <p:nvPr/>
-        </p:nvSpPr>
-        <p:spPr>
-          <a:xfrm>
-            <a:off x="6331148" y="3436382"/>
-            <a:ext cx="1967984" cy="218480"/>
-          </a:xfrm>
-          <a:prstGeom prst="rect">
-            <a:avLst/>
-          </a:prstGeom>
-          <a:noFill/>
-          <a:ln/>
-        </p:spPr>
-        <p:txBody>
-          <a:bodyPr wrap="none" lIns="0" tIns="0" rIns="0" bIns="0" rtlCol="0" anchor="t"/>
-          <a:lstStyle/>
-          <a:p>
-            <a:pPr algn="ctr" indent="0" marL="0">
-              <a:lnSpc>
-                <a:spcPts val="1700"/>
-              </a:lnSpc>
-              <a:buNone/>
-            </a:pPr>
-            <a:r>
-              <a:rPr lang="en-US" sz="1350" b="1" dirty="0">
-                <a:solidFill>
-                  <a:srgbClr val="272525"/>
-                </a:solidFill>
-                <a:latin typeface="Petrona Bold" pitchFamily="34" charset="0"/>
-                <a:ea typeface="Petrona Bold" pitchFamily="34" charset="-122"/>
-                <a:cs typeface="Petrona Bold" pitchFamily="34" charset="-120"/>
-              </a:rPr>
-              <a:t>Actual vs. Predicted (GB)</a:t>
-            </a:r>
-            <a:endParaRPr lang="en-US" sz="1350" dirty="0"/>
-          </a:p>
-        </p:txBody>
-      </p:sp>
-      <p:sp>
-        <p:nvSpPr>
-          <p:cNvPr id="8" name="Text 4"/>
-          <p:cNvSpPr/>
-          <p:nvPr/>
-        </p:nvSpPr>
-        <p:spPr>
-          <a:xfrm>
-            <a:off x="5677972" y="3703677"/>
-            <a:ext cx="3274338" cy="500420"/>
-          </a:xfrm>
-          <a:prstGeom prst="rect">
-            <a:avLst/>
-          </a:prstGeom>
-          <a:noFill/>
-          <a:ln/>
-        </p:spPr>
-        <p:txBody>
-          <a:bodyPr wrap="square" lIns="0" tIns="0" rIns="0" bIns="0" rtlCol="0" anchor="t"/>
-          <a:lstStyle/>
-          <a:p>
-            <a:pPr algn="ctr" indent="0" marL="0">
-              <a:lnSpc>
-                <a:spcPts val="1300"/>
-              </a:lnSpc>
-              <a:buNone/>
-            </a:pPr>
-            <a:r>
-              <a:rPr lang="en-US" sz="1000" dirty="0">
-                <a:solidFill>
-                  <a:srgbClr val="272525"/>
-                </a:solidFill>
-                <a:latin typeface="Inter" pitchFamily="34" charset="0"/>
-                <a:ea typeface="Inter" pitchFamily="34" charset="-122"/>
-                <a:cs typeface="Inter" pitchFamily="34" charset="-120"/>
-              </a:rPr>
-              <a:t>Points align closely along the diagonal — accurate overall. Slight spread at higher prices reveals larger errors for expensive houses.</a:t>
-            </a:r>
-            <a:endParaRPr lang="en-US" sz="1000" dirty="0"/>
-          </a:p>
-        </p:txBody>
-      </p:sp>
-      <p:pic>
-        <p:nvPicPr>
-          <p:cNvPr id="9" name="Image 2" descr="preencoded.png">    </p:cNvPr>
+          <p:cNvPr id="3" name="Image 0" descr="preencoded.png"/>
           <p:cNvPicPr>
             <a:picLocks noChangeAspect="1"/>
           </p:cNvPicPr>
@@ -4017,7 +3631,7 @@
         </p:blipFill>
         <p:spPr>
           <a:xfrm>
-            <a:off x="9512498" y="977146"/>
+            <a:off x="2760345" y="977146"/>
             <a:ext cx="2357438" cy="2357438"/>
           </a:xfrm>
           <a:prstGeom prst="rect">
@@ -4027,13 +3641,13 @@
       </p:pic>
       <p:sp>
         <p:nvSpPr>
-          <p:cNvPr id="10" name="Text 5"/>
-          <p:cNvSpPr/>
-          <p:nvPr/>
-        </p:nvSpPr>
-        <p:spPr>
-          <a:xfrm>
-            <a:off x="9817060" y="3436382"/>
+          <p:cNvPr id="4" name="Text 1"/>
+          <p:cNvSpPr/>
+          <p:nvPr/>
+        </p:nvSpPr>
+        <p:spPr>
+          <a:xfrm>
+            <a:off x="3064907" y="3436382"/>
             <a:ext cx="1748195" cy="218480"/>
           </a:xfrm>
           <a:prstGeom prst="rect">
@@ -4046,7 +3660,7 @@
           <a:bodyPr wrap="none" lIns="0" tIns="0" rIns="0" bIns="0" rtlCol="0" anchor="t"/>
           <a:lstStyle/>
           <a:p>
-            <a:pPr algn="ctr" indent="0" marL="0">
+            <a:pPr marL="0" indent="0" algn="ctr">
               <a:lnSpc>
                 <a:spcPts val="1700"/>
               </a:lnSpc>
@@ -4061,7 +3675,7 @@
                 <a:ea typeface="Petrona Bold" pitchFamily="34" charset="-122"/>
                 <a:cs typeface="Petrona Bold" pitchFamily="34" charset="-120"/>
               </a:rPr>
-              <a:t>Residual Distribution</a:t>
+              <a:t>RMSE Across Folds</a:t>
             </a:r>
             <a:endParaRPr lang="en-US" sz="1350" dirty="0"/>
           </a:p>
@@ -4069,13 +3683,13 @@
       </p:sp>
       <p:sp>
         <p:nvSpPr>
-          <p:cNvPr id="11" name="Text 6"/>
-          <p:cNvSpPr/>
-          <p:nvPr/>
-        </p:nvSpPr>
-        <p:spPr>
-          <a:xfrm>
-            <a:off x="9054108" y="3703677"/>
+          <p:cNvPr id="5" name="Text 2"/>
+          <p:cNvSpPr/>
+          <p:nvPr/>
+        </p:nvSpPr>
+        <p:spPr>
+          <a:xfrm>
+            <a:off x="2301954" y="3703677"/>
             <a:ext cx="3274219" cy="500420"/>
           </a:xfrm>
           <a:prstGeom prst="rect">
@@ -4088,7 +3702,7 @@
           <a:bodyPr wrap="square" lIns="0" tIns="0" rIns="0" bIns="0" rtlCol="0" anchor="t"/>
           <a:lstStyle/>
           <a:p>
-            <a:pPr algn="ctr" indent="0" marL="0">
+            <a:pPr marL="0" indent="0" algn="ctr">
               <a:lnSpc>
                 <a:spcPts val="1300"/>
               </a:lnSpc>
@@ -4103,7 +3717,7 @@
                 <a:ea typeface="Inter" pitchFamily="34" charset="-122"/>
                 <a:cs typeface="Inter" pitchFamily="34" charset="-120"/>
               </a:rPr>
-              <a:t>Centered around 0 — model is unbiased. Most residuals within ±30k, confirming RMSE ≈ 29k. Some large outliers increase RMSE.</a:t>
+              <a:t>GB is consistently lower across all folds. Ridge &amp; Lasso show large spikes — indicating instability and underfitting.</a:t>
             </a:r>
             <a:endParaRPr lang="en-US" sz="1000" dirty="0"/>
           </a:p>
@@ -4111,7 +3725,7 @@
       </p:sp>
       <p:pic>
         <p:nvPicPr>
-          <p:cNvPr id="12" name="Image 3" descr="preencoded.png">    </p:cNvPr>
+          <p:cNvPr id="6" name="Image 1" descr="preencoded.png"/>
           <p:cNvPicPr>
             <a:picLocks noChangeAspect="1"/>
           </p:cNvPicPr>
@@ -4125,7 +3739,7 @@
         </p:blipFill>
         <p:spPr>
           <a:xfrm>
-            <a:off x="6136362" y="4366974"/>
+            <a:off x="6136362" y="977146"/>
             <a:ext cx="2357438" cy="2357438"/>
           </a:xfrm>
           <a:prstGeom prst="rect">
@@ -4135,14 +3749,14 @@
       </p:pic>
       <p:sp>
         <p:nvSpPr>
-          <p:cNvPr id="13" name="Text 7"/>
-          <p:cNvSpPr/>
-          <p:nvPr/>
-        </p:nvSpPr>
-        <p:spPr>
-          <a:xfrm>
-            <a:off x="6441043" y="6826210"/>
-            <a:ext cx="1748195" cy="218480"/>
+          <p:cNvPr id="7" name="Text 3"/>
+          <p:cNvSpPr/>
+          <p:nvPr/>
+        </p:nvSpPr>
+        <p:spPr>
+          <a:xfrm>
+            <a:off x="6331148" y="3436382"/>
+            <a:ext cx="1967984" cy="218480"/>
           </a:xfrm>
           <a:prstGeom prst="rect">
             <a:avLst/>
@@ -4154,7 +3768,7 @@
           <a:bodyPr wrap="none" lIns="0" tIns="0" rIns="0" bIns="0" rtlCol="0" anchor="t"/>
           <a:lstStyle/>
           <a:p>
-            <a:pPr algn="ctr" indent="0" marL="0">
+            <a:pPr marL="0" indent="0" algn="ctr">
               <a:lnSpc>
                 <a:spcPts val="1700"/>
               </a:lnSpc>
@@ -4169,7 +3783,7 @@
                 <a:ea typeface="Petrona Bold" pitchFamily="34" charset="-122"/>
                 <a:cs typeface="Petrona Bold" pitchFamily="34" charset="-120"/>
               </a:rPr>
-              <a:t>Error vs. Price</a:t>
+              <a:t>Actual vs. Predicted (GB)</a:t>
             </a:r>
             <a:endParaRPr lang="en-US" sz="1350" dirty="0"/>
           </a:p>
@@ -4177,13 +3791,13 @@
       </p:sp>
       <p:sp>
         <p:nvSpPr>
-          <p:cNvPr id="14" name="Text 8"/>
-          <p:cNvSpPr/>
-          <p:nvPr/>
-        </p:nvSpPr>
-        <p:spPr>
-          <a:xfrm>
-            <a:off x="5677972" y="7093506"/>
+          <p:cNvPr id="8" name="Text 4"/>
+          <p:cNvSpPr/>
+          <p:nvPr/>
+        </p:nvSpPr>
+        <p:spPr>
+          <a:xfrm>
+            <a:off x="5677972" y="3703677"/>
             <a:ext cx="3274338" cy="500420"/>
           </a:xfrm>
           <a:prstGeom prst="rect">
@@ -4196,7 +3810,7 @@
           <a:bodyPr wrap="square" lIns="0" tIns="0" rIns="0" bIns="0" rtlCol="0" anchor="t"/>
           <a:lstStyle/>
           <a:p>
-            <a:pPr algn="ctr" indent="0" marL="0">
+            <a:pPr marL="0" indent="0" algn="ctr">
               <a:lnSpc>
                 <a:spcPts val="1300"/>
               </a:lnSpc>
@@ -4211,16 +3825,107 @@
                 <a:ea typeface="Inter" pitchFamily="34" charset="-122"/>
                 <a:cs typeface="Inter" pitchFamily="34" charset="-120"/>
               </a:rPr>
-              <a:t>Clear pattern: higher price → larger error. Suggests </a:t>
-            </a:r>
-            <a:pPr algn="ctr" indent="0" marL="0">
+              <a:t>Points align closely along the diagonal — accurate overall. Slight spread at higher prices reveals larger errors for expensive houses.</a:t>
+            </a:r>
+            <a:endParaRPr lang="en-US" sz="1000" dirty="0"/>
+          </a:p>
+        </p:txBody>
+      </p:sp>
+      <p:pic>
+        <p:nvPicPr>
+          <p:cNvPr id="9" name="Image 2" descr="preencoded.png"/>
+          <p:cNvPicPr>
+            <a:picLocks noChangeAspect="1"/>
+          </p:cNvPicPr>
+          <p:nvPr/>
+        </p:nvPicPr>
+        <p:blipFill>
+          <a:blip r:embed="rId5"/>
+          <a:stretch>
+            <a:fillRect/>
+          </a:stretch>
+        </p:blipFill>
+        <p:spPr>
+          <a:xfrm>
+            <a:off x="9512498" y="977146"/>
+            <a:ext cx="2357438" cy="2357438"/>
+          </a:xfrm>
+          <a:prstGeom prst="rect">
+            <a:avLst/>
+          </a:prstGeom>
+        </p:spPr>
+      </p:pic>
+      <p:sp>
+        <p:nvSpPr>
+          <p:cNvPr id="10" name="Text 5"/>
+          <p:cNvSpPr/>
+          <p:nvPr/>
+        </p:nvSpPr>
+        <p:spPr>
+          <a:xfrm>
+            <a:off x="9817060" y="3436382"/>
+            <a:ext cx="1748195" cy="218480"/>
+          </a:xfrm>
+          <a:prstGeom prst="rect">
+            <a:avLst/>
+          </a:prstGeom>
+          <a:noFill/>
+          <a:ln/>
+        </p:spPr>
+        <p:txBody>
+          <a:bodyPr wrap="none" lIns="0" tIns="0" rIns="0" bIns="0" rtlCol="0" anchor="t"/>
+          <a:lstStyle/>
+          <a:p>
+            <a:pPr marL="0" indent="0" algn="ctr">
+              <a:lnSpc>
+                <a:spcPts val="1700"/>
+              </a:lnSpc>
+              <a:buNone/>
+            </a:pPr>
+            <a:r>
+              <a:rPr lang="en-US" sz="1350" b="1" dirty="0">
+                <a:solidFill>
+                  <a:srgbClr val="272525"/>
+                </a:solidFill>
+                <a:latin typeface="Petrona Bold" pitchFamily="34" charset="0"/>
+                <a:ea typeface="Petrona Bold" pitchFamily="34" charset="-122"/>
+                <a:cs typeface="Petrona Bold" pitchFamily="34" charset="-120"/>
+              </a:rPr>
+              <a:t>Residual Distribution</a:t>
+            </a:r>
+            <a:endParaRPr lang="en-US" sz="1350" dirty="0"/>
+          </a:p>
+        </p:txBody>
+      </p:sp>
+      <p:sp>
+        <p:nvSpPr>
+          <p:cNvPr id="11" name="Text 6"/>
+          <p:cNvSpPr/>
+          <p:nvPr/>
+        </p:nvSpPr>
+        <p:spPr>
+          <a:xfrm>
+            <a:off x="9054108" y="3703677"/>
+            <a:ext cx="3274219" cy="500420"/>
+          </a:xfrm>
+          <a:prstGeom prst="rect">
+            <a:avLst/>
+          </a:prstGeom>
+          <a:noFill/>
+          <a:ln/>
+        </p:spPr>
+        <p:txBody>
+          <a:bodyPr wrap="square" lIns="0" tIns="0" rIns="0" bIns="0" rtlCol="0" anchor="t"/>
+          <a:lstStyle/>
+          <a:p>
+            <a:pPr marL="0" indent="0" algn="ctr">
               <a:lnSpc>
                 <a:spcPts val="1300"/>
               </a:lnSpc>
               <a:buNone/>
             </a:pPr>
             <a:r>
-              <a:rPr lang="en-US" sz="1000" b="1" dirty="0">
+              <a:rPr lang="en-US" sz="1000" dirty="0">
                 <a:solidFill>
                   <a:srgbClr val="272525"/>
                 </a:solidFill>
@@ -4228,9 +3933,100 @@
                 <a:ea typeface="Inter" pitchFamily="34" charset="-122"/>
                 <a:cs typeface="Inter" pitchFamily="34" charset="-120"/>
               </a:rPr>
-              <a:t>heteroscedasticity</a:t>
-            </a:r>
-            <a:pPr algn="ctr" indent="0" marL="0">
+              <a:t>Centered around 0 — model is unbiased. Most residuals within ±30k, confirming RMSE ≈ 29k. Some large outliers increase RMSE.</a:t>
+            </a:r>
+            <a:endParaRPr lang="en-US" sz="1000" dirty="0"/>
+          </a:p>
+        </p:txBody>
+      </p:sp>
+      <p:pic>
+        <p:nvPicPr>
+          <p:cNvPr id="12" name="Image 3" descr="preencoded.png"/>
+          <p:cNvPicPr>
+            <a:picLocks noChangeAspect="1"/>
+          </p:cNvPicPr>
+          <p:nvPr/>
+        </p:nvPicPr>
+        <p:blipFill>
+          <a:blip r:embed="rId6"/>
+          <a:stretch>
+            <a:fillRect/>
+          </a:stretch>
+        </p:blipFill>
+        <p:spPr>
+          <a:xfrm>
+            <a:off x="6136362" y="4366974"/>
+            <a:ext cx="2357438" cy="2357438"/>
+          </a:xfrm>
+          <a:prstGeom prst="rect">
+            <a:avLst/>
+          </a:prstGeom>
+        </p:spPr>
+      </p:pic>
+      <p:sp>
+        <p:nvSpPr>
+          <p:cNvPr id="13" name="Text 7"/>
+          <p:cNvSpPr/>
+          <p:nvPr/>
+        </p:nvSpPr>
+        <p:spPr>
+          <a:xfrm>
+            <a:off x="6441043" y="6826210"/>
+            <a:ext cx="1748195" cy="218480"/>
+          </a:xfrm>
+          <a:prstGeom prst="rect">
+            <a:avLst/>
+          </a:prstGeom>
+          <a:noFill/>
+          <a:ln/>
+        </p:spPr>
+        <p:txBody>
+          <a:bodyPr wrap="none" lIns="0" tIns="0" rIns="0" bIns="0" rtlCol="0" anchor="t"/>
+          <a:lstStyle/>
+          <a:p>
+            <a:pPr marL="0" indent="0" algn="ctr">
+              <a:lnSpc>
+                <a:spcPts val="1700"/>
+              </a:lnSpc>
+              <a:buNone/>
+            </a:pPr>
+            <a:r>
+              <a:rPr lang="en-US" sz="1350" b="1" dirty="0">
+                <a:solidFill>
+                  <a:srgbClr val="272525"/>
+                </a:solidFill>
+                <a:latin typeface="Petrona Bold" pitchFamily="34" charset="0"/>
+                <a:ea typeface="Petrona Bold" pitchFamily="34" charset="-122"/>
+                <a:cs typeface="Petrona Bold" pitchFamily="34" charset="-120"/>
+              </a:rPr>
+              <a:t>Error vs. Price</a:t>
+            </a:r>
+            <a:endParaRPr lang="en-US" sz="1350" dirty="0"/>
+          </a:p>
+        </p:txBody>
+      </p:sp>
+      <p:sp>
+        <p:nvSpPr>
+          <p:cNvPr id="14" name="Text 8"/>
+          <p:cNvSpPr/>
+          <p:nvPr/>
+        </p:nvSpPr>
+        <p:spPr>
+          <a:xfrm>
+            <a:off x="5677972" y="7093506"/>
+            <a:ext cx="3274338" cy="500420"/>
+          </a:xfrm>
+          <a:prstGeom prst="rect">
+            <a:avLst/>
+          </a:prstGeom>
+          <a:noFill/>
+          <a:ln/>
+        </p:spPr>
+        <p:txBody>
+          <a:bodyPr wrap="square" lIns="0" tIns="0" rIns="0" bIns="0" rtlCol="0" anchor="t"/>
+          <a:lstStyle/>
+          <a:p>
+            <a:pPr marL="0" indent="0" algn="ctr">
               <a:lnSpc>
                 <a:spcPts val="1300"/>
               </a:lnSpc>
@@ -4245,41 +4041,10 @@
                 <a:ea typeface="Inter" pitchFamily="34" charset="-122"/>
                 <a:cs typeface="Inter" pitchFamily="34" charset="-120"/>
               </a:rPr>
-              <a:t> — model struggles most with expensive houses.</a:t>
-            </a:r>
-            <a:endParaRPr lang="en-US" sz="1000" dirty="0"/>
-          </a:p>
-        </p:txBody>
-      </p:sp>
-      <p:sp>
-        <p:nvSpPr>
-          <p:cNvPr id="15" name="Text 9"/>
-          <p:cNvSpPr/>
-          <p:nvPr/>
-        </p:nvSpPr>
-        <p:spPr>
-          <a:xfrm>
-            <a:off x="2301954" y="7685484"/>
-            <a:ext cx="10026491" cy="166807"/>
-          </a:xfrm>
-          <a:prstGeom prst="rect">
-            <a:avLst/>
-          </a:prstGeom>
-          <a:noFill/>
-          <a:ln/>
-        </p:spPr>
-        <p:txBody>
-          <a:bodyPr wrap="none" lIns="0" tIns="0" rIns="0" bIns="0" rtlCol="0" anchor="t"/>
-          <a:lstStyle/>
-          <a:p>
-            <a:pPr algn="l" indent="0" marL="0">
-              <a:lnSpc>
-                <a:spcPts val="1300"/>
-              </a:lnSpc>
-              <a:buNone/>
-            </a:pPr>
-            <a:r>
-              <a:rPr lang="en-US" sz="1000" dirty="0">
+              <a:t>Clear pattern: higher price → larger error. Suggests </a:t>
+            </a:r>
+            <a:r>
+              <a:rPr lang="en-US" sz="1000" b="1" dirty="0">
                 <a:solidFill>
                   <a:srgbClr val="272525"/>
                 </a:solidFill>
@@ -4287,16 +4052,10 @@
                 <a:ea typeface="Inter" pitchFamily="34" charset="-122"/>
                 <a:cs typeface="Inter" pitchFamily="34" charset="-120"/>
               </a:rPr>
-              <a:t>Top features by importance: </a:t>
-            </a:r>
-            <a:pPr algn="l" indent="0" marL="0">
-              <a:lnSpc>
-                <a:spcPts val="1300"/>
-              </a:lnSpc>
-              <a:buNone/>
-            </a:pPr>
-            <a:r>
-              <a:rPr lang="en-US" sz="1000" b="1" dirty="0">
+              <a:t>heteroscedasticity</a:t>
+            </a:r>
+            <a:r>
+              <a:rPr lang="en-US" sz="1000" dirty="0">
                 <a:solidFill>
                   <a:srgbClr val="272525"/>
                 </a:solidFill>
@@ -4304,14 +4063,61 @@
                 <a:ea typeface="Inter" pitchFamily="34" charset="-122"/>
                 <a:cs typeface="Inter" pitchFamily="34" charset="-120"/>
               </a:rPr>
+              <a:t> — model struggles most with expensive houses.</a:t>
+            </a:r>
+            <a:endParaRPr lang="en-US" sz="1000" dirty="0"/>
+          </a:p>
+        </p:txBody>
+      </p:sp>
+      <p:sp>
+        <p:nvSpPr>
+          <p:cNvPr id="15" name="Text 9"/>
+          <p:cNvSpPr/>
+          <p:nvPr/>
+        </p:nvSpPr>
+        <p:spPr>
+          <a:xfrm>
+            <a:off x="2301954" y="7685484"/>
+            <a:ext cx="10026491" cy="166807"/>
+          </a:xfrm>
+          <a:prstGeom prst="rect">
+            <a:avLst/>
+          </a:prstGeom>
+          <a:noFill/>
+          <a:ln/>
+        </p:spPr>
+        <p:txBody>
+          <a:bodyPr wrap="none" lIns="0" tIns="0" rIns="0" bIns="0" rtlCol="0" anchor="t"/>
+          <a:lstStyle/>
+          <a:p>
+            <a:pPr marL="0" indent="0" algn="l">
+              <a:lnSpc>
+                <a:spcPts val="1300"/>
+              </a:lnSpc>
+              <a:buNone/>
+            </a:pPr>
+            <a:r>
+              <a:rPr lang="en-US" sz="1000" dirty="0">
+                <a:solidFill>
+                  <a:srgbClr val="272525"/>
+                </a:solidFill>
+                <a:latin typeface="Inter" pitchFamily="34" charset="0"/>
+                <a:ea typeface="Inter" pitchFamily="34" charset="-122"/>
+                <a:cs typeface="Inter" pitchFamily="34" charset="-120"/>
+              </a:rPr>
+              <a:t>Top features by importance: </a:t>
+            </a:r>
+            <a:r>
+              <a:rPr lang="en-US" sz="1000" b="1" dirty="0">
+                <a:solidFill>
+                  <a:srgbClr val="272525"/>
+                </a:solidFill>
+                <a:latin typeface="Inter" pitchFamily="34" charset="0"/>
+                <a:ea typeface="Inter" pitchFamily="34" charset="-122"/>
+                <a:cs typeface="Inter" pitchFamily="34" charset="-120"/>
+              </a:rPr>
               <a:t>OverallQual, GrLivArea, TotalBsmtSF</a:t>
             </a:r>
-            <a:pPr algn="l" indent="0" marL="0">
-              <a:lnSpc>
-                <a:spcPts val="1300"/>
-              </a:lnSpc>
-              <a:buNone/>
-            </a:pPr>
             <a:r>
               <a:rPr lang="en-US" sz="1000" dirty="0">
                 <a:solidFill>
@@ -4373,7 +4179,7 @@
           <a:bodyPr wrap="none" lIns="0" tIns="0" rIns="0" bIns="0" rtlCol="0" anchor="t"/>
           <a:lstStyle/>
           <a:p>
-            <a:pPr algn="l" indent="0" marL="0">
+            <a:pPr marL="0" indent="0" algn="l">
               <a:lnSpc>
                 <a:spcPts val="5350"/>
               </a:lnSpc>
@@ -4420,6 +4226,13 @@
             <a:prstDash val="solid"/>
           </a:ln>
         </p:spPr>
+        <p:txBody>
+          <a:bodyPr/>
+          <a:lstStyle/>
+          <a:p>
+            <a:endParaRPr lang="en-US"/>
+          </a:p>
+        </p:txBody>
       </p:sp>
       <p:sp>
         <p:nvSpPr>
@@ -4442,6 +4255,13 @@
           </a:solidFill>
           <a:ln/>
         </p:spPr>
+        <p:txBody>
+          <a:bodyPr/>
+          <a:lstStyle/>
+          <a:p>
+            <a:endParaRPr lang="en-US"/>
+          </a:p>
+        </p:txBody>
       </p:sp>
       <p:sp>
         <p:nvSpPr>
@@ -4464,7 +4284,7 @@
           <a:bodyPr wrap="none" lIns="0" tIns="0" rIns="0" bIns="0" rtlCol="0" anchor="t"/>
           <a:lstStyle/>
           <a:p>
-            <a:pPr algn="l" indent="0" marL="0">
+            <a:pPr marL="0" indent="0" algn="l">
               <a:lnSpc>
                 <a:spcPts val="2650"/>
               </a:lnSpc>
@@ -4506,7 +4326,7 @@
           <a:bodyPr wrap="square" lIns="0" tIns="0" rIns="0" bIns="0" rtlCol="0" anchor="t"/>
           <a:lstStyle/>
           <a:p>
-            <a:pPr algn="l" indent="0" marL="0">
+            <a:pPr marL="0" indent="0" algn="l">
               <a:lnSpc>
                 <a:spcPts val="2500"/>
               </a:lnSpc>
@@ -4553,6 +4373,13 @@
             <a:prstDash val="solid"/>
           </a:ln>
         </p:spPr>
+        <p:txBody>
+          <a:bodyPr/>
+          <a:lstStyle/>
+          <a:p>
+            <a:endParaRPr lang="en-US"/>
+          </a:p>
+        </p:txBody>
       </p:sp>
       <p:sp>
         <p:nvSpPr>
@@ -4575,6 +4402,13 @@
           </a:solidFill>
           <a:ln/>
         </p:spPr>
+        <p:txBody>
+          <a:bodyPr/>
+          <a:lstStyle/>
+          <a:p>
+            <a:endParaRPr lang="en-US"/>
+          </a:p>
+        </p:txBody>
       </p:sp>
       <p:sp>
         <p:nvSpPr>
@@ -4597,7 +4431,7 @@
           <a:bodyPr wrap="none" lIns="0" tIns="0" rIns="0" bIns="0" rtlCol="0" anchor="t"/>
           <a:lstStyle/>
           <a:p>
-            <a:pPr algn="l" indent="0" marL="0">
+            <a:pPr marL="0" indent="0" algn="l">
               <a:lnSpc>
                 <a:spcPts val="2650"/>
               </a:lnSpc>
@@ -4639,7 +4473,7 @@
           <a:bodyPr wrap="square" lIns="0" tIns="0" rIns="0" bIns="0" rtlCol="0" anchor="t"/>
           <a:lstStyle/>
           <a:p>
-            <a:pPr algn="l" indent="0" marL="0">
+            <a:pPr marL="0" indent="0" algn="l">
               <a:lnSpc>
                 <a:spcPts val="2500"/>
               </a:lnSpc>
@@ -4686,6 +4520,13 @@
             <a:prstDash val="solid"/>
           </a:ln>
         </p:spPr>
+        <p:txBody>
+          <a:bodyPr/>
+          <a:lstStyle/>
+          <a:p>
+            <a:endParaRPr lang="en-US"/>
+          </a:p>
+        </p:txBody>
       </p:sp>
       <p:sp>
         <p:nvSpPr>
@@ -4708,6 +4549,13 @@
           </a:solidFill>
           <a:ln/>
         </p:spPr>
+        <p:txBody>
+          <a:bodyPr/>
+          <a:lstStyle/>
+          <a:p>
+            <a:endParaRPr lang="en-US"/>
+          </a:p>
+        </p:txBody>
       </p:sp>
       <p:sp>
         <p:nvSpPr>
@@ -4730,7 +4578,7 @@
           <a:bodyPr wrap="none" lIns="0" tIns="0" rIns="0" bIns="0" rtlCol="0" anchor="t"/>
           <a:lstStyle/>
           <a:p>
-            <a:pPr algn="l" indent="0" marL="0">
+            <a:pPr marL="0" indent="0" algn="l">
               <a:lnSpc>
                 <a:spcPts val="2650"/>
               </a:lnSpc>
@@ -4772,7 +4620,7 @@
           <a:bodyPr wrap="square" lIns="0" tIns="0" rIns="0" bIns="0" rtlCol="0" anchor="t"/>
           <a:lstStyle/>
           <a:p>
-            <a:pPr algn="l" indent="0" marL="0">
+            <a:pPr marL="0" indent="0" algn="l">
               <a:lnSpc>
                 <a:spcPts val="2500"/>
               </a:lnSpc>
@@ -4819,6 +4667,13 @@
             <a:prstDash val="solid"/>
           </a:ln>
         </p:spPr>
+        <p:txBody>
+          <a:bodyPr/>
+          <a:lstStyle/>
+          <a:p>
+            <a:endParaRPr lang="en-US"/>
+          </a:p>
+        </p:txBody>
       </p:sp>
       <p:sp>
         <p:nvSpPr>
@@ -4841,6 +4696,13 @@
           </a:solidFill>
           <a:ln/>
         </p:spPr>
+        <p:txBody>
+          <a:bodyPr/>
+          <a:lstStyle/>
+          <a:p>
+            <a:endParaRPr lang="en-US"/>
+          </a:p>
+        </p:txBody>
       </p:sp>
       <p:sp>
         <p:nvSpPr>
@@ -4863,7 +4725,7 @@
           <a:bodyPr wrap="none" lIns="0" tIns="0" rIns="0" bIns="0" rtlCol="0" anchor="t"/>
           <a:lstStyle/>
           <a:p>
-            <a:pPr algn="l" indent="0" marL="0">
+            <a:pPr marL="0" indent="0" algn="l">
               <a:lnSpc>
                 <a:spcPts val="2650"/>
               </a:lnSpc>
@@ -4905,7 +4767,7 @@
           <a:bodyPr wrap="square" lIns="0" tIns="0" rIns="0" bIns="0" rtlCol="0" anchor="t"/>
           <a:lstStyle/>
           <a:p>
-            <a:pPr algn="l" indent="0" marL="0">
+            <a:pPr marL="0" indent="0" algn="l">
               <a:lnSpc>
                 <a:spcPts val="2500"/>
               </a:lnSpc>
@@ -4952,6 +4814,13 @@
             <a:prstDash val="solid"/>
           </a:ln>
         </p:spPr>
+        <p:txBody>
+          <a:bodyPr/>
+          <a:lstStyle/>
+          <a:p>
+            <a:endParaRPr lang="en-US"/>
+          </a:p>
+        </p:txBody>
       </p:sp>
       <p:sp>
         <p:nvSpPr>
@@ -4974,6 +4843,13 @@
           </a:solidFill>
           <a:ln/>
         </p:spPr>
+        <p:txBody>
+          <a:bodyPr/>
+          <a:lstStyle/>
+          <a:p>
+            <a:endParaRPr lang="en-US"/>
+          </a:p>
+        </p:txBody>
       </p:sp>
       <p:sp>
         <p:nvSpPr>
@@ -4996,7 +4872,7 @@
           <a:bodyPr wrap="none" lIns="0" tIns="0" rIns="0" bIns="0" rtlCol="0" anchor="t"/>
           <a:lstStyle/>
           <a:p>
-            <a:pPr algn="l" indent="0" marL="0">
+            <a:pPr marL="0" indent="0" algn="l">
               <a:lnSpc>
                 <a:spcPts val="2650"/>
               </a:lnSpc>
@@ -5038,7 +4914,7 @@
           <a:bodyPr wrap="none" lIns="0" tIns="0" rIns="0" bIns="0" rtlCol="0" anchor="t"/>
           <a:lstStyle/>
           <a:p>
-            <a:pPr algn="l" indent="0" marL="0">
+            <a:pPr marL="0" indent="0" algn="l">
               <a:lnSpc>
                 <a:spcPts val="2500"/>
               </a:lnSpc>
@@ -5085,6 +4961,13 @@
             <a:prstDash val="solid"/>
           </a:ln>
         </p:spPr>
+        <p:txBody>
+          <a:bodyPr/>
+          <a:lstStyle/>
+          <a:p>
+            <a:endParaRPr lang="en-US"/>
+          </a:p>
+        </p:txBody>
       </p:sp>
       <p:sp>
         <p:nvSpPr>
@@ -5107,6 +4990,13 @@
           </a:solidFill>
           <a:ln/>
         </p:spPr>
+        <p:txBody>
+          <a:bodyPr/>
+          <a:lstStyle/>
+          <a:p>
+            <a:endParaRPr lang="en-US"/>
+          </a:p>
+        </p:txBody>
       </p:sp>
       <p:sp>
         <p:nvSpPr>
@@ -5129,7 +5019,7 @@
           <a:bodyPr wrap="none" lIns="0" tIns="0" rIns="0" bIns="0" rtlCol="0" anchor="t"/>
           <a:lstStyle/>
           <a:p>
-            <a:pPr algn="l" indent="0" marL="0">
+            <a:pPr marL="0" indent="0" algn="l">
               <a:lnSpc>
                 <a:spcPts val="2650"/>
               </a:lnSpc>
@@ -5171,7 +5061,7 @@
           <a:bodyPr wrap="square" lIns="0" tIns="0" rIns="0" bIns="0" rtlCol="0" anchor="t"/>
           <a:lstStyle/>
           <a:p>
-            <a:pPr algn="l" indent="0" marL="0">
+            <a:pPr marL="0" indent="0" algn="l">
               <a:lnSpc>
                 <a:spcPts val="2500"/>
               </a:lnSpc>
@@ -5238,7 +5128,7 @@
           <a:bodyPr wrap="none" lIns="0" tIns="0" rIns="0" bIns="0" rtlCol="0" anchor="t"/>
           <a:lstStyle/>
           <a:p>
-            <a:pPr algn="l" indent="0" marL="0">
+            <a:pPr marL="0" indent="0" algn="l">
               <a:lnSpc>
                 <a:spcPts val="4250"/>
               </a:lnSpc>
@@ -5280,6 +5170,13 @@
           </a:solidFill>
           <a:ln/>
         </p:spPr>
+        <p:txBody>
+          <a:bodyPr/>
+          <a:lstStyle/>
+          <a:p>
+            <a:endParaRPr lang="en-US"/>
+          </a:p>
+        </p:txBody>
       </p:sp>
       <p:sp>
         <p:nvSpPr>
@@ -5302,7 +5199,7 @@
           <a:bodyPr wrap="none" lIns="0" tIns="0" rIns="0" bIns="0" rtlCol="0" anchor="t"/>
           <a:lstStyle/>
           <a:p>
-            <a:pPr algn="l" indent="0" marL="0">
+            <a:pPr marL="0" indent="0" algn="l">
               <a:lnSpc>
                 <a:spcPts val="2100"/>
               </a:lnSpc>
@@ -5332,7 +5229,7 @@
         <p:spPr>
           <a:xfrm>
             <a:off x="1123474" y="1769626"/>
-            <a:ext cx="5954435" cy="1041321"/>
+            <a:ext cx="5954435" cy="1501854"/>
           </a:xfrm>
           <a:prstGeom prst="rect">
             <a:avLst/>
@@ -5344,7 +5241,7 @@
           <a:bodyPr wrap="square" lIns="0" tIns="0" rIns="0" bIns="0" rtlCol="0" anchor="t"/>
           <a:lstStyle/>
           <a:p>
-            <a:pPr algn="l" marL="342900" indent="-342900">
+            <a:pPr marL="342900" indent="-342900" algn="l">
               <a:lnSpc>
                 <a:spcPts val="1750"/>
               </a:lnSpc>
@@ -5365,7 +5262,7 @@
             <a:endParaRPr lang="en-US" sz="1200" dirty="0"/>
           </a:p>
           <a:p>
-            <a:pPr algn="l" marL="342900" indent="-342900">
+            <a:pPr marL="342900" indent="-342900" algn="l">
               <a:lnSpc>
                 <a:spcPts val="1750"/>
               </a:lnSpc>
@@ -5386,7 +5283,7 @@
             <a:endParaRPr lang="en-US" sz="1200" dirty="0"/>
           </a:p>
           <a:p>
-            <a:pPr algn="l" marL="342900" indent="-342900">
+            <a:pPr marL="342900" indent="-342900" algn="l">
               <a:lnSpc>
                 <a:spcPts val="1750"/>
               </a:lnSpc>
@@ -5407,7 +5304,7 @@
             <a:endParaRPr lang="en-US" sz="1200" dirty="0"/>
           </a:p>
           <a:p>
-            <a:pPr algn="l" marL="342900" indent="-342900">
+            <a:pPr marL="342900" indent="-342900" algn="l">
               <a:lnSpc>
                 <a:spcPts val="1750"/>
               </a:lnSpc>
@@ -5425,6 +5322,165 @@
               </a:rPr>
               <a:t>Clear connection of results back to hypothesis</a:t>
             </a:r>
+          </a:p>
+          <a:p>
+            <a:pPr marL="342900" indent="-342900">
+              <a:lnSpc>
+                <a:spcPts val="1750"/>
+              </a:lnSpc>
+              <a:buSzPct val="100000"/>
+              <a:buFontTx/>
+              <a:buChar char="•"/>
+            </a:pPr>
+            <a:r>
+              <a:rPr lang="en-US" altLang="zh-CN" sz="1200" dirty="0">
+                <a:solidFill>
+                  <a:srgbClr val="FFFFFF"/>
+                </a:solidFill>
+                <a:latin typeface="Inter" pitchFamily="34" charset="0"/>
+                <a:ea typeface="Inter" pitchFamily="34" charset="-122"/>
+                <a:cs typeface="Inter" pitchFamily="34" charset="-120"/>
+              </a:rPr>
+              <a:t>Test</a:t>
+            </a:r>
+            <a:r>
+              <a:rPr lang="zh-CN" altLang="en-US" sz="1200" dirty="0">
+                <a:solidFill>
+                  <a:srgbClr val="FFFFFF"/>
+                </a:solidFill>
+                <a:latin typeface="Inter" pitchFamily="34" charset="0"/>
+                <a:ea typeface="Inter" pitchFamily="34" charset="-122"/>
+                <a:cs typeface="Inter" pitchFamily="34" charset="-120"/>
+              </a:rPr>
+              <a:t> </a:t>
+            </a:r>
+            <a:r>
+              <a:rPr lang="en-US" altLang="zh-CN" sz="1200" dirty="0">
+                <a:solidFill>
+                  <a:srgbClr val="FFFFFF"/>
+                </a:solidFill>
+                <a:latin typeface="Inter" pitchFamily="34" charset="0"/>
+                <a:ea typeface="Inter" pitchFamily="34" charset="-122"/>
+                <a:cs typeface="Inter" pitchFamily="34" charset="-120"/>
+              </a:rPr>
+              <a:t>Kaggle</a:t>
+            </a:r>
+            <a:r>
+              <a:rPr lang="zh-CN" altLang="en-US" sz="1200" dirty="0">
+                <a:solidFill>
+                  <a:srgbClr val="FFFFFF"/>
+                </a:solidFill>
+                <a:latin typeface="Inter" pitchFamily="34" charset="0"/>
+                <a:ea typeface="Inter" pitchFamily="34" charset="-122"/>
+                <a:cs typeface="Inter" pitchFamily="34" charset="-120"/>
+              </a:rPr>
+              <a:t> </a:t>
+            </a:r>
+            <a:r>
+              <a:rPr lang="en-US" altLang="zh-CN" sz="1200" dirty="0" err="1">
+                <a:solidFill>
+                  <a:srgbClr val="FFFFFF"/>
+                </a:solidFill>
+                <a:latin typeface="Inter" pitchFamily="34" charset="0"/>
+                <a:ea typeface="Inter" pitchFamily="34" charset="-122"/>
+                <a:cs typeface="Inter" pitchFamily="34" charset="-120"/>
+              </a:rPr>
+              <a:t>test.csv</a:t>
+            </a:r>
+            <a:r>
+              <a:rPr lang="zh-CN" altLang="en-US" sz="1200" dirty="0">
+                <a:solidFill>
+                  <a:srgbClr val="FFFFFF"/>
+                </a:solidFill>
+                <a:latin typeface="Inter" pitchFamily="34" charset="0"/>
+                <a:ea typeface="Inter" pitchFamily="34" charset="-122"/>
+                <a:cs typeface="Inter" pitchFamily="34" charset="-120"/>
+              </a:rPr>
+              <a:t> </a:t>
+            </a:r>
+            <a:r>
+              <a:rPr lang="en-US" altLang="zh-CN" sz="1200" dirty="0">
+                <a:solidFill>
+                  <a:srgbClr val="FFFFFF"/>
+                </a:solidFill>
+                <a:latin typeface="Inter" pitchFamily="34" charset="0"/>
+                <a:ea typeface="Inter" pitchFamily="34" charset="-122"/>
+                <a:cs typeface="Inter" pitchFamily="34" charset="-120"/>
+              </a:rPr>
+              <a:t>to</a:t>
+            </a:r>
+            <a:r>
+              <a:rPr lang="zh-CN" altLang="en-US" sz="1200" dirty="0">
+                <a:solidFill>
+                  <a:srgbClr val="FFFFFF"/>
+                </a:solidFill>
+                <a:latin typeface="Inter" pitchFamily="34" charset="0"/>
+                <a:ea typeface="Inter" pitchFamily="34" charset="-122"/>
+                <a:cs typeface="Inter" pitchFamily="34" charset="-120"/>
+              </a:rPr>
+              <a:t> </a:t>
+            </a:r>
+            <a:r>
+              <a:rPr lang="en-US" altLang="zh-CN" sz="1200" dirty="0">
+                <a:solidFill>
+                  <a:srgbClr val="FFFFFF"/>
+                </a:solidFill>
+                <a:latin typeface="Inter" pitchFamily="34" charset="0"/>
+                <a:ea typeface="Inter" pitchFamily="34" charset="-122"/>
+                <a:cs typeface="Inter" pitchFamily="34" charset="-120"/>
+              </a:rPr>
+              <a:t>verify</a:t>
+            </a:r>
+            <a:r>
+              <a:rPr lang="zh-CN" altLang="en-US" sz="1200" dirty="0">
+                <a:solidFill>
+                  <a:srgbClr val="FFFFFF"/>
+                </a:solidFill>
+                <a:latin typeface="Inter" pitchFamily="34" charset="0"/>
+                <a:ea typeface="Inter" pitchFamily="34" charset="-122"/>
+                <a:cs typeface="Inter" pitchFamily="34" charset="-120"/>
+              </a:rPr>
+              <a:t> </a:t>
+            </a:r>
+            <a:r>
+              <a:rPr lang="en-US" altLang="zh-CN" sz="1200" dirty="0">
+                <a:solidFill>
+                  <a:srgbClr val="FFFFFF"/>
+                </a:solidFill>
+                <a:latin typeface="Inter" pitchFamily="34" charset="0"/>
+                <a:ea typeface="Inter" pitchFamily="34" charset="-122"/>
+                <a:cs typeface="Inter" pitchFamily="34" charset="-120"/>
+              </a:rPr>
+              <a:t>result</a:t>
+            </a:r>
+            <a:r>
+              <a:rPr lang="zh-CN" altLang="en-US" sz="1200" dirty="0">
+                <a:solidFill>
+                  <a:srgbClr val="FFFFFF"/>
+                </a:solidFill>
+                <a:latin typeface="Inter" pitchFamily="34" charset="0"/>
+                <a:ea typeface="Inter" pitchFamily="34" charset="-122"/>
+                <a:cs typeface="Inter" pitchFamily="34" charset="-120"/>
+              </a:rPr>
+              <a:t> </a:t>
+            </a:r>
+            <a:endParaRPr lang="en-US" sz="1200" dirty="0">
+              <a:solidFill>
+                <a:srgbClr val="FFFFFF"/>
+              </a:solidFill>
+              <a:latin typeface="Inter" pitchFamily="34" charset="0"/>
+              <a:ea typeface="Inter" pitchFamily="34" charset="-122"/>
+              <a:cs typeface="Inter" pitchFamily="34" charset="-120"/>
+            </a:endParaRPr>
+          </a:p>
+          <a:p>
+            <a:pPr marL="342900" indent="-342900" algn="l">
+              <a:lnSpc>
+                <a:spcPts val="1750"/>
+              </a:lnSpc>
+              <a:buSzPct val="100000"/>
+              <a:buChar char="•"/>
+            </a:pPr>
             <a:endParaRPr lang="en-US" sz="1200" dirty="0"/>
           </a:p>
         </p:txBody>
@@ -5450,7 +5506,7 @@
           <a:bodyPr wrap="none" lIns="0" tIns="0" rIns="0" bIns="0" rtlCol="0" anchor="t"/>
           <a:lstStyle/>
           <a:p>
-            <a:pPr algn="l" indent="0" marL="0">
+            <a:pPr marL="0" indent="0" algn="l">
               <a:lnSpc>
                 <a:spcPts val="2100"/>
               </a:lnSpc>
@@ -5492,7 +5548,7 @@
           <a:bodyPr wrap="none" lIns="0" tIns="0" rIns="0" bIns="0" rtlCol="0" anchor="t"/>
           <a:lstStyle/>
           <a:p>
-            <a:pPr algn="l" indent="0" marL="0">
+            <a:pPr marL="0" indent="0" algn="l">
               <a:lnSpc>
                 <a:spcPts val="1750"/>
               </a:lnSpc>
@@ -5532,6 +5588,13 @@
           </a:solidFill>
           <a:ln/>
         </p:spPr>
+        <p:txBody>
+          <a:bodyPr/>
+          <a:lstStyle/>
+          <a:p>
+            <a:endParaRPr lang="en-US"/>
+          </a:p>
+        </p:txBody>
       </p:sp>
       <p:sp>
         <p:nvSpPr>
@@ -5554,7 +5617,7 @@
           <a:bodyPr wrap="none" lIns="0" tIns="0" rIns="0" bIns="0" rtlCol="0" anchor="t"/>
           <a:lstStyle/>
           <a:p>
-            <a:pPr algn="l" indent="0" marL="0">
+            <a:pPr marL="0" indent="0" algn="l">
               <a:lnSpc>
                 <a:spcPts val="2100"/>
               </a:lnSpc>
@@ -5596,7 +5659,7 @@
           <a:bodyPr wrap="none" lIns="0" tIns="0" rIns="0" bIns="0" rtlCol="0" anchor="t"/>
           <a:lstStyle/>
           <a:p>
-            <a:pPr algn="l" indent="0" marL="0">
+            <a:pPr marL="0" indent="0" algn="l">
               <a:lnSpc>
                 <a:spcPts val="1750"/>
               </a:lnSpc>
@@ -5638,7 +5701,7 @@
           <a:bodyPr wrap="none" lIns="0" tIns="0" rIns="0" bIns="0" rtlCol="0" anchor="t"/>
           <a:lstStyle/>
           <a:p>
-            <a:pPr algn="l" indent="0" marL="0">
+            <a:pPr marL="0" indent="0" algn="l">
               <a:lnSpc>
                 <a:spcPts val="1750"/>
               </a:lnSpc>
@@ -5678,6 +5741,13 @@
           </a:solidFill>
           <a:ln/>
         </p:spPr>
+        <p:txBody>
+          <a:bodyPr/>
+          <a:lstStyle/>
+          <a:p>
+            <a:endParaRPr lang="en-US"/>
+          </a:p>
+        </p:txBody>
       </p:sp>
       <p:sp>
         <p:nvSpPr>
@@ -5700,7 +5770,7 @@
           <a:bodyPr wrap="none" lIns="0" tIns="0" rIns="0" bIns="0" rtlCol="0" anchor="t"/>
           <a:lstStyle/>
           <a:p>
-            <a:pPr algn="l" indent="0" marL="0">
+            <a:pPr marL="0" indent="0" algn="l">
               <a:lnSpc>
                 <a:spcPts val="2100"/>
               </a:lnSpc>
@@ -5742,7 +5812,7 @@
           <a:bodyPr wrap="none" lIns="0" tIns="0" rIns="0" bIns="0" rtlCol="0" anchor="t"/>
           <a:lstStyle/>
           <a:p>
-            <a:pPr algn="l" indent="0" marL="0">
+            <a:pPr marL="0" indent="0" algn="l">
               <a:lnSpc>
                 <a:spcPts val="1750"/>
               </a:lnSpc>
@@ -5784,7 +5854,7 @@
           <a:bodyPr wrap="none" lIns="0" tIns="0" rIns="0" bIns="0" rtlCol="0" anchor="t"/>
           <a:lstStyle/>
           <a:p>
-            <a:pPr algn="l" indent="0" marL="0">
+            <a:pPr marL="0" indent="0" algn="l">
               <a:lnSpc>
                 <a:spcPts val="1750"/>
               </a:lnSpc>
@@ -5824,6 +5894,13 @@
           </a:solidFill>
           <a:ln/>
         </p:spPr>
+        <p:txBody>
+          <a:bodyPr/>
+          <a:lstStyle/>
+          <a:p>
+            <a:endParaRPr lang="en-US"/>
+          </a:p>
+        </p:txBody>
       </p:sp>
       <p:sp>
         <p:nvSpPr>
@@ -5846,7 +5923,7 @@
           <a:bodyPr wrap="none" lIns="0" tIns="0" rIns="0" bIns="0" rtlCol="0" anchor="t"/>
           <a:lstStyle/>
           <a:p>
-            <a:pPr algn="l" indent="0" marL="0">
+            <a:pPr marL="0" indent="0" algn="l">
               <a:lnSpc>
                 <a:spcPts val="2100"/>
               </a:lnSpc>
@@ -5888,7 +5965,7 @@
           <a:bodyPr wrap="none" lIns="0" tIns="0" rIns="0" bIns="0" rtlCol="0" anchor="t"/>
           <a:lstStyle/>
           <a:p>
-            <a:pPr algn="l" indent="0" marL="0">
+            <a:pPr marL="0" indent="0" algn="l">
               <a:lnSpc>
                 <a:spcPts val="1750"/>
               </a:lnSpc>
@@ -5930,7 +6007,7 @@
           <a:bodyPr wrap="none" lIns="0" tIns="0" rIns="0" bIns="0" rtlCol="0" anchor="t"/>
           <a:lstStyle/>
           <a:p>
-            <a:pPr algn="l" indent="0" marL="0">
+            <a:pPr marL="0" indent="0" algn="l">
               <a:lnSpc>
                 <a:spcPts val="1750"/>
               </a:lnSpc>
@@ -5970,6 +6047,13 @@
           </a:solidFill>
           <a:ln/>
         </p:spPr>
+        <p:txBody>
+          <a:bodyPr/>
+          <a:lstStyle/>
+          <a:p>
+            <a:endParaRPr lang="en-US"/>
+          </a:p>
+        </p:txBody>
       </p:sp>
       <p:sp>
         <p:nvSpPr>
@@ -5992,7 +6076,7 @@
           <a:bodyPr wrap="none" lIns="0" tIns="0" rIns="0" bIns="0" rtlCol="0" anchor="t"/>
           <a:lstStyle/>
           <a:p>
-            <a:pPr algn="l" indent="0" marL="0">
+            <a:pPr marL="0" indent="0" algn="l">
               <a:lnSpc>
                 <a:spcPts val="2100"/>
               </a:lnSpc>
@@ -6034,7 +6118,7 @@
           <a:bodyPr wrap="none" lIns="0" tIns="0" rIns="0" bIns="0" rtlCol="0" anchor="t"/>
           <a:lstStyle/>
           <a:p>
-            <a:pPr algn="l" indent="0" marL="0">
+            <a:pPr marL="0" indent="0" algn="l">
               <a:lnSpc>
                 <a:spcPts val="1750"/>
               </a:lnSpc>
@@ -6076,17 +6160,24 @@
           </a:solidFill>
           <a:ln/>
         </p:spPr>
+        <p:txBody>
+          <a:bodyPr/>
+          <a:lstStyle/>
+          <a:p>
+            <a:endParaRPr lang="en-US"/>
+          </a:p>
+        </p:txBody>
       </p:sp>
       <p:pic>
         <p:nvPicPr>
-          <p:cNvPr id="24" name="Image 0" descr="preencoded.png">    </p:cNvPr>
+          <p:cNvPr id="24" name="Image 0" descr="preencoded.png"/>
           <p:cNvPicPr>
             <a:picLocks noChangeAspect="1"/>
           </p:cNvPicPr>
           <p:nvPr/>
         </p:nvPicPr>
         <p:blipFill>
-          <a:blip r:embed="rId1"/>
+          <a:blip r:embed="rId3"/>
           <a:stretch>
             <a:fillRect/>
           </a:stretch>
@@ -6122,7 +6213,7 @@
           <a:bodyPr wrap="square" lIns="0" tIns="0" rIns="0" bIns="0" rtlCol="0" anchor="t"/>
           <a:lstStyle/>
           <a:p>
-            <a:pPr algn="l" indent="0" marL="0">
+            <a:pPr marL="0" indent="0" algn="l">
               <a:lnSpc>
                 <a:spcPts val="1750"/>
               </a:lnSpc>
@@ -6444,4 +6535,319 @@
     </a:ext>
   </a:extLst>
 </a:theme>
+</file>
+
+<file path=ppt/theme/theme2.xml><?xml version="1.0" encoding="utf-8"?>
+<a:theme xmlns:a="http://schemas.openxmlformats.org/drawingml/2006/main" name="Office Theme">
+  <a:themeElements>
+    <a:clrScheme name="Office">
+      <a:dk1>
+        <a:sysClr val="windowText" lastClr="000000"/>
+      </a:dk1>
+      <a:lt1>
+        <a:sysClr val="window" lastClr="FFFFFF"/>
+      </a:lt1>
+      <a:dk2>
+        <a:srgbClr val="0E2841"/>
+      </a:dk2>
+      <a:lt2>
+        <a:srgbClr val="E8E8E8"/>
+      </a:lt2>
+      <a:accent1>
+        <a:srgbClr val="156082"/>
+      </a:accent1>
+      <a:accent2>
+        <a:srgbClr val="E97132"/>
+      </a:accent2>
+      <a:accent3>
+        <a:srgbClr val="196B24"/>
+      </a:accent3>
+      <a:accent4>
+        <a:srgbClr val="0F9ED5"/>
+      </a:accent4>
+      <a:accent5>
+        <a:srgbClr val="A02B93"/>
+      </a:accent5>
+      <a:accent6>
+        <a:srgbClr val="4EA72E"/>
+      </a:accent6>
+      <a:hlink>
+        <a:srgbClr val="467886"/>
+      </a:hlink>
+      <a:folHlink>
+        <a:srgbClr val="96607D"/>
+      </a:folHlink>
+    </a:clrScheme>
+    <a:fontScheme name="Office">
+      <a:majorFont>
+        <a:latin typeface="Aptos Display" panose="02110004020202020204"/>
+        <a:ea typeface=""/>
+        <a:cs typeface=""/>
+        <a:font script="Jpan" typeface="游ゴシック Light"/>
+        <a:font script="Hang" typeface="맑은 고딕"/>
+        <a:font script="Hans" typeface="等线 Light"/>
+        <a:font script="Hant" typeface="新細明體"/>
+        <a:font script="Arab" typeface="Times New Roman"/>
+        <a:font script="Hebr" typeface="Times New Roman"/>
+        <a:font script="Thai" typeface="Angsana New"/>
+        <a:font script="Ethi" typeface="Nyala"/>
+        <a:font script="Beng" typeface="Vrinda"/>
+        <a:font script="Gujr" typeface="Shruti"/>
+        <a:font script="Khmr" typeface="MoolBoran"/>
+        <a:font script="Knda" typeface="Tunga"/>
+        <a:font script="Guru" typeface="Raavi"/>
+        <a:font script="Cans" typeface="Euphemia"/>
+        <a:font script="Cher" typeface="Plantagenet Cherokee"/>
+        <a:font script="Yiii" typeface="Microsoft Yi Baiti"/>
+        <a:font script="Tibt" typeface="Microsoft Himalaya"/>
+        <a:font script="Thaa" typeface="MV Boli"/>
+        <a:font script="Deva" typeface="Mangal"/>
+        <a:font script="Telu" typeface="Gautami"/>
+        <a:font script="Taml" typeface="Latha"/>
+        <a:font script="Syrc" typeface="Estrangelo Edessa"/>
+        <a:font script="Orya" typeface="Kalinga"/>
+        <a:font script="Mlym" typeface="Kartika"/>
+        <a:font script="Laoo" typeface="DokChampa"/>
+        <a:font script="Sinh" typeface="Iskoola Pota"/>
+        <a:font script="Mong" typeface="Mongolian Baiti"/>
+        <a:font script="Viet" typeface="Times New Roman"/>
+        <a:font script="Uigh" typeface="Microsoft Uighur"/>
+        <a:font script="Geor" typeface="Sylfaen"/>
+        <a:font script="Armn" typeface="Arial"/>
+        <a:font script="Bugi" typeface="Leelawadee UI"/>
+        <a:font script="Bopo" typeface="Microsoft JhengHei"/>
+        <a:font script="Java" typeface="Javanese Text"/>
+        <a:font script="Lisu" typeface="Segoe UI"/>
+        <a:font script="Mymr" typeface="Myanmar Text"/>
+        <a:font script="Nkoo" typeface="Ebrima"/>
+        <a:font script="Olck" typeface="Nirmala UI"/>
+        <a:font script="Osma" typeface="Ebrima"/>
+        <a:font script="Phag" typeface="Phagspa"/>
+        <a:font script="Syrn" typeface="Estrangelo Edessa"/>
+        <a:font script="Syrj" typeface="Estrangelo Edessa"/>
+        <a:font script="Syre" typeface="Estrangelo Edessa"/>
+        <a:font script="Sora" typeface="Nirmala UI"/>
+        <a:font script="Tale" typeface="Microsoft Tai Le"/>
+        <a:font script="Talu" typeface="Microsoft New Tai Lue"/>
+        <a:font script="Tfng" typeface="Ebrima"/>
+      </a:majorFont>
+      <a:minorFont>
+        <a:latin typeface="Aptos" panose="02110004020202020204"/>
+        <a:ea typeface=""/>
+        <a:cs typeface=""/>
+        <a:font script="Jpan" typeface="游ゴシック"/>
+        <a:font script="Hang" typeface="맑은 고딕"/>
+        <a:font script="Hans" typeface="等线"/>
+        <a:font script="Hant" typeface="新細明體"/>
+        <a:font script="Arab" typeface="Arial"/>
+        <a:font script="Hebr" typeface="Arial"/>
+        <a:font script="Thai" typeface="Cordia New"/>
+        <a:font script="Ethi" typeface="Nyala"/>
+        <a:font script="Beng" typeface="Vrinda"/>
+        <a:font script="Gujr" typeface="Shruti"/>
+        <a:font script="Khmr" typeface="DaunPenh"/>
+        <a:font script="Knda" typeface="Tunga"/>
+        <a:font script="Guru" typeface="Raavi"/>
+        <a:font script="Cans" typeface="Euphemia"/>
+        <a:font script="Cher" typeface="Plantagenet Cherokee"/>
+        <a:font script="Yiii" typeface="Microsoft Yi Baiti"/>
+        <a:font script="Tibt" typeface="Microsoft Himalaya"/>
+        <a:font script="Thaa" typeface="MV Boli"/>
+        <a:font script="Deva" typeface="Mangal"/>
+        <a:font script="Telu" typeface="Gautami"/>
+        <a:font script="Taml" typeface="Latha"/>
+        <a:font script="Syrc" typeface="Estrangelo Edessa"/>
+        <a:font script="Orya" typeface="Kalinga"/>
+        <a:font script="Mlym" typeface="Kartika"/>
+        <a:font script="Laoo" typeface="DokChampa"/>
+        <a:font script="Sinh" typeface="Iskoola Pota"/>
+        <a:font script="Mong" typeface="Mongolian Baiti"/>
+        <a:font script="Viet" typeface="Arial"/>
+        <a:font script="Uigh" typeface="Microsoft Uighur"/>
+        <a:font script="Geor" typeface="Sylfaen"/>
+        <a:font script="Armn" typeface="Arial"/>
+        <a:font script="Bugi" typeface="Leelawadee UI"/>
+        <a:font script="Bopo" typeface="Microsoft JhengHei"/>
+        <a:font script="Java" typeface="Javanese Text"/>
+        <a:font script="Lisu" typeface="Segoe UI"/>
+        <a:font script="Mymr" typeface="Myanmar Text"/>
+        <a:font script="Nkoo" typeface="Ebrima"/>
+        <a:font script="Olck" typeface="Nirmala UI"/>
+        <a:font script="Osma" typeface="Ebrima"/>
+        <a:font script="Phag" typeface="Phagspa"/>
+        <a:font script="Syrn" typeface="Estrangelo Edessa"/>
+        <a:font script="Syrj" typeface="Estrangelo Edessa"/>
+        <a:font script="Syre" typeface="Estrangelo Edessa"/>
+        <a:font script="Sora" typeface="Nirmala UI"/>
+        <a:font script="Tale" typeface="Microsoft Tai Le"/>
+        <a:font script="Talu" typeface="Microsoft New Tai Lue"/>
+        <a:font script="Tfng" typeface="Ebrima"/>
+      </a:minorFont>
+    </a:fontScheme>
+    <a:fmtScheme name="Office">
+      <a:fillStyleLst>
+        <a:solidFill>
+          <a:schemeClr val="phClr"/>
+        </a:solidFill>
+        <a:gradFill rotWithShape="1">
+          <a:gsLst>
+            <a:gs pos="0">
+              <a:schemeClr val="phClr">
+                <a:lumMod val="110000"/>
+                <a:satMod val="105000"/>
+                <a:tint val="67000"/>
+              </a:schemeClr>
+            </a:gs>
+            <a:gs pos="50000">
+              <a:schemeClr val="phClr">
+                <a:lumMod val="105000"/>
+                <a:satMod val="103000"/>
+                <a:tint val="73000"/>
+              </a:schemeClr>
+            </a:gs>
+            <a:gs pos="100000">
+              <a:schemeClr val="phClr">
+                <a:lumMod val="105000"/>
+                <a:satMod val="109000"/>
+                <a:tint val="81000"/>
+              </a:schemeClr>
+            </a:gs>
+          </a:gsLst>
+          <a:lin ang="5400000" scaled="0"/>
+        </a:gradFill>
+        <a:gradFill rotWithShape="1">
+          <a:gsLst>
+            <a:gs pos="0">
+              <a:schemeClr val="phClr">
+                <a:satMod val="103000"/>
+                <a:lumMod val="102000"/>
+                <a:tint val="94000"/>
+              </a:schemeClr>
+            </a:gs>
+            <a:gs pos="50000">
+              <a:schemeClr val="phClr">
+                <a:satMod val="110000"/>
+                <a:lumMod val="100000"/>
+                <a:shade val="100000"/>
+              </a:schemeClr>
+            </a:gs>
+            <a:gs pos="100000">
+              <a:schemeClr val="phClr">
+                <a:lumMod val="99000"/>
+                <a:satMod val="120000"/>
+                <a:shade val="78000"/>
+              </a:schemeClr>
+            </a:gs>
+          </a:gsLst>
+          <a:lin ang="5400000" scaled="0"/>
+        </a:gradFill>
+      </a:fillStyleLst>
+      <a:lnStyleLst>
+        <a:ln w="12700" cap="flat" cmpd="sng" algn="ctr">
+          <a:solidFill>
+            <a:schemeClr val="phClr"/>
+          </a:solidFill>
+          <a:prstDash val="solid"/>
+          <a:miter lim="800000"/>
+        </a:ln>
+        <a:ln w="19050" cap="flat" cmpd="sng" algn="ctr">
+          <a:solidFill>
+            <a:schemeClr val="phClr"/>
+          </a:solidFill>
+          <a:prstDash val="solid"/>
+          <a:miter lim="800000"/>
+        </a:ln>
+        <a:ln w="25400" cap="flat" cmpd="sng" algn="ctr">
+          <a:solidFill>
+            <a:schemeClr val="phClr"/>
+          </a:solidFill>
+          <a:prstDash val="solid"/>
+          <a:miter lim="800000"/>
+        </a:ln>
+      </a:lnStyleLst>
+      <a:effectStyleLst>
+        <a:effectStyle>
+          <a:effectLst/>
+        </a:effectStyle>
+        <a:effectStyle>
+          <a:effectLst/>
+        </a:effectStyle>
+        <a:effectStyle>
+          <a:effectLst>
+            <a:outerShdw blurRad="57150" dist="19050" dir="5400000" algn="ctr" rotWithShape="0">
+              <a:srgbClr val="000000">
+                <a:alpha val="63000"/>
+              </a:srgbClr>
+            </a:outerShdw>
+          </a:effectLst>
+        </a:effectStyle>
+      </a:effectStyleLst>
+      <a:bgFillStyleLst>
+        <a:solidFill>
+          <a:schemeClr val="phClr"/>
+        </a:solidFill>
+        <a:solidFill>
+          <a:schemeClr val="phClr">
+            <a:tint val="95000"/>
+            <a:satMod val="170000"/>
+          </a:schemeClr>
+        </a:solidFill>
+        <a:gradFill rotWithShape="1">
+          <a:gsLst>
+            <a:gs pos="0">
+              <a:schemeClr val="phClr">
+                <a:tint val="93000"/>
+                <a:satMod val="150000"/>
+                <a:shade val="98000"/>
+                <a:lumMod val="102000"/>
+              </a:schemeClr>
+            </a:gs>
+            <a:gs pos="50000">
+              <a:schemeClr val="phClr">
+                <a:tint val="98000"/>
+                <a:satMod val="130000"/>
+                <a:shade val="90000"/>
+                <a:lumMod val="103000"/>
+              </a:schemeClr>
+            </a:gs>
+            <a:gs pos="100000">
+              <a:schemeClr val="phClr">
+                <a:shade val="63000"/>
+                <a:satMod val="120000"/>
+              </a:schemeClr>
+            </a:gs>
+          </a:gsLst>
+          <a:lin ang="5400000" scaled="0"/>
+        </a:gradFill>
+      </a:bgFillStyleLst>
+    </a:fmtScheme>
+  </a:themeElements>
+  <a:objectDefaults>
+    <a:lnDef>
+      <a:spPr/>
+      <a:bodyPr/>
+      <a:lstStyle/>
+      <a:style>
+        <a:lnRef idx="2">
+          <a:schemeClr val="accent1"/>
+        </a:lnRef>
+        <a:fillRef idx="0">
+          <a:schemeClr val="accent1"/>
+        </a:fillRef>
+        <a:effectRef idx="1">
+          <a:schemeClr val="accent1"/>
+        </a:effectRef>
+        <a:fontRef idx="minor">
+          <a:schemeClr val="tx1"/>
+        </a:fontRef>
+      </a:style>
+    </a:lnDef>
+  </a:objectDefaults>
+  <a:extraClrSchemeLst/>
+  <a:extLst>
+    <a:ext uri="{05A4C25C-085E-4340-85A3-A5531E510DB2}">
+      <thm15:themeFamily xmlns:thm15="http://schemas.microsoft.com/office/thememl/2012/main" name="Office Theme" id="{2E142A2C-CD16-42D6-873A-C26D2A0506FA}" vid="{1BDDFF52-6CD6-40A5-AB3C-68EB2F1E4D0A}"/>
+    </a:ext>
+  </a:extLst>
+</a:theme>
 </file>